--- a/deliverable/中期答辩.pptx
+++ b/deliverable/中期答辩.pptx
@@ -3421,7 +3421,7 @@
                 <a:ea typeface="微软雅黑"/>
                 <a:cs typeface="Arial"/>
               </a:rPr>
-              <a:t>结果解读：组间波动源于组装质量差异</a:t>
+              <a:t>下一步：极简抑菌实验验证候选抗菌肽</a:t>
             </a:r>
           </a:p>
         </p:txBody>
@@ -3468,21 +3468,45 @@
                 <a:ea typeface="微软雅黑"/>
                 <a:cs typeface="Arial"/>
               </a:rPr>
-              <a:t>阶段性结果 · 解读与启示</a:t>
-            </a:r>
-          </a:p>
-        </p:txBody>
-      </p:sp>
-      <p:sp>
-        <p:nvSpPr>
-          <p:cNvPr id="4" name="TextBox 3"/>
+              <a:t>下一步计划 · 第七步</a:t>
+            </a:r>
+          </a:p>
+        </p:txBody>
+      </p:sp>
+      <p:pic>
+        <p:nvPicPr>
+          <p:cNvPr id="4" name="Picture 3" descr="figF_抑菌实验方案.png"/>
+          <p:cNvPicPr>
+            <a:picLocks noChangeAspect="1"/>
+          </p:cNvPicPr>
+          <p:nvPr/>
+        </p:nvPicPr>
+        <p:blipFill>
+          <a:blip r:embed="rId2"/>
+          <a:stretch>
+            <a:fillRect/>
+          </a:stretch>
+        </p:blipFill>
+        <p:spPr>
+          <a:xfrm>
+            <a:off x="1348587" y="1463040"/>
+            <a:ext cx="9494520" cy="3017520"/>
+          </a:xfrm>
+          <a:prstGeom prst="rect">
+            <a:avLst/>
+          </a:prstGeom>
+        </p:spPr>
+      </p:pic>
+      <p:sp>
+        <p:nvSpPr>
+          <p:cNvPr id="5" name="TextBox 4"/>
           <p:cNvSpPr txBox="1"/>
           <p:nvPr/>
         </p:nvSpPr>
         <p:spPr>
           <a:xfrm>
-            <a:off x="566928" y="1481328"/>
-            <a:ext cx="11057839" cy="3291840"/>
+            <a:off x="566928" y="4754880"/>
+            <a:ext cx="11057839" cy="914400"/>
           </a:xfrm>
           <a:prstGeom prst="rect">
             <a:avLst/>
@@ -3507,18 +3531,7 @@
               </a:spcAft>
             </a:pPr>
             <a:r>
-              <a:rPr sz="1700" b="1">
-                <a:solidFill>
-                  <a:srgbClr val="2F6FB0"/>
-                </a:solidFill>
-                <a:latin typeface="Arial"/>
-                <a:ea typeface="微软雅黑"/>
-                <a:cs typeface="Arial"/>
-              </a:rPr>
-              <a:t>波动来源：</a:t>
-            </a:r>
-            <a:r>
-              <a:rPr sz="1700" b="0">
+              <a:rPr sz="1650" b="0">
                 <a:solidFill>
                   <a:srgbClr val="12324F"/>
                 </a:solidFill>
@@ -3526,119 +3539,14 @@
                 <a:ea typeface="微软雅黑"/>
                 <a:cs typeface="Arial"/>
               </a:rPr>
-              <a:t>Total_sORF 的组间波动与代表基因组数 N_MAG 同向变化（匹配队列中 MCI 均值 3.5、AD 均值 4.7），提示由贡献基因组数量驱动。</a:t>
-            </a:r>
-          </a:p>
-          <a:p>
-            <a:pPr algn="l">
-              <a:lnSpc>
-                <a:spcPct val="125000"/>
-              </a:lnSpc>
-              <a:spcBef>
-                <a:spcPts val="1500"/>
-              </a:spcBef>
-              <a:spcAft>
-                <a:spcPts val="0"/>
-              </a:spcAft>
-            </a:pPr>
-            <a:r>
-              <a:rPr sz="1700" b="1">
-                <a:solidFill>
-                  <a:srgbClr val="2F6FB0"/>
-                </a:solidFill>
-                <a:latin typeface="Arial"/>
-                <a:ea typeface="微软雅黑"/>
-                <a:cs typeface="Arial"/>
-              </a:rPr>
-              <a:t>方向不一致：</a:t>
-            </a:r>
-            <a:r>
-              <a:rPr sz="1700" b="0">
-                <a:solidFill>
-                  <a:srgbClr val="12324F"/>
-                </a:solidFill>
-                <a:latin typeface="Arial"/>
-                <a:ea typeface="微软雅黑"/>
-                <a:cs typeface="Arial"/>
-              </a:rPr>
-              <a:t>sORF_per_MAG 在匹配队列中 AD 略高于 NC（114 555.0 vs 113 306.7），在全队列中则相反（111 582.5 vs 114 529.3），支持组间无真实差异。</a:t>
-            </a:r>
-          </a:p>
-          <a:p>
-            <a:pPr algn="l">
-              <a:lnSpc>
-                <a:spcPct val="125000"/>
-              </a:lnSpc>
-              <a:spcBef>
-                <a:spcPts val="1500"/>
-              </a:spcBef>
-              <a:spcAft>
-                <a:spcPts val="0"/>
-              </a:spcAft>
-            </a:pPr>
-            <a:r>
-              <a:rPr sz="1700" b="1">
-                <a:solidFill>
-                  <a:srgbClr val="2F6FB0"/>
-                </a:solidFill>
-                <a:latin typeface="Arial"/>
-                <a:ea typeface="微软雅黑"/>
-                <a:cs typeface="Arial"/>
-              </a:rPr>
-              <a:t>效应量对比：</a:t>
-            </a:r>
-            <a:r>
-              <a:rPr sz="1700" b="0">
-                <a:solidFill>
-                  <a:srgbClr val="12324F"/>
-                </a:solidFill>
-                <a:latin typeface="Arial"/>
-                <a:ea typeface="微软雅黑"/>
-                <a:cs typeface="Arial"/>
-              </a:rPr>
-              <a:t>组间相对差异为 9.4%（匹配队列）与 5.5%（全队列），远小于单个基因组间 sORF 产出量的固有差异（约 21.3 倍）。</a:t>
-            </a:r>
-          </a:p>
-          <a:p>
-            <a:pPr algn="l">
-              <a:lnSpc>
-                <a:spcPct val="125000"/>
-              </a:lnSpc>
-              <a:spcBef>
-                <a:spcPts val="1500"/>
-              </a:spcBef>
-              <a:spcAft>
-                <a:spcPts val="0"/>
-              </a:spcAft>
-            </a:pPr>
-            <a:r>
-              <a:rPr sz="1700" b="1">
-                <a:solidFill>
-                  <a:srgbClr val="2F6FB0"/>
-                </a:solidFill>
-                <a:latin typeface="Arial"/>
-                <a:ea typeface="微软雅黑"/>
-                <a:cs typeface="Arial"/>
-              </a:rPr>
-              <a:t>研究启示：</a:t>
-            </a:r>
-            <a:r>
-              <a:rPr sz="1700" b="0">
-                <a:solidFill>
-                  <a:srgbClr val="12324F"/>
-                </a:solidFill>
-                <a:latin typeface="Arial"/>
-                <a:ea typeface="微软雅黑"/>
-                <a:cs typeface="Arial"/>
-              </a:rPr>
-              <a:t>AD 病程中微生物源 sORF 的总体编码容量保持稳定；差异若存在，更可能体现于序列组成与功能亚类，因此后续分析须转向候选抗菌肽层面。</a:t>
-            </a:r>
-          </a:p>
-        </p:txBody>
-      </p:sp>
-      <p:sp>
-        <p:nvSpPr>
-          <p:cNvPr id="5" name="Rounded Rectangle 4"/>
+              <a:t>选择少量、有代表性的候选抗菌肽进行人工合成，以常见指示菌做纸片扩散法初筛，再以微量肉汤稀释法测定最低抑菌浓度，用最小工作量获得最直接的活性证据。</a:t>
+            </a:r>
+          </a:p>
+        </p:txBody>
+      </p:sp>
+      <p:sp>
+        <p:nvSpPr>
+          <p:cNvPr id="6" name="Rounded Rectangle 5"/>
           <p:cNvSpPr/>
           <p:nvPr/>
         </p:nvSpPr>
@@ -3700,14 +3608,14 @@
                 <a:ea typeface="微软雅黑"/>
                 <a:cs typeface="Arial"/>
               </a:rPr>
-              <a:t>阴性结果明确了技术方向：下一步聚焦候选抗菌肽的组成差异与阶段演变</a:t>
-            </a:r>
-          </a:p>
-        </p:txBody>
-      </p:sp>
-      <p:sp>
-        <p:nvSpPr>
-          <p:cNvPr id="6" name="TextBox 5"/>
+              <a:t>实验方案刻意保持简单：常规微生物实验室即可完成，用于最小可行性验证</a:t>
+            </a:r>
+          </a:p>
+        </p:txBody>
+      </p:sp>
+      <p:sp>
+        <p:nvSpPr>
+          <p:cNvPr id="7" name="TextBox 6"/>
           <p:cNvSpPr txBox="1"/>
           <p:nvPr/>
         </p:nvSpPr>
@@ -3754,7 +3662,7 @@
       </p:sp>
       <p:sp>
         <p:nvSpPr>
-          <p:cNvPr id="7" name="TextBox 6"/>
+          <p:cNvPr id="8" name="TextBox 7"/>
           <p:cNvSpPr txBox="1"/>
           <p:nvPr/>
         </p:nvSpPr>
@@ -3859,7 +3767,7 @@
                 <a:ea typeface="微软雅黑"/>
                 <a:cs typeface="Arial"/>
               </a:rPr>
-              <a:t>下一步 ①：构建 DeepMetaAMP 抗菌肽预测模型</a:t>
+              <a:t>工作进度：主要分析已完成，进入验证与撰写阶段</a:t>
             </a:r>
           </a:p>
         </p:txBody>
@@ -3906,14 +3814,14 @@
                 <a:ea typeface="微软雅黑"/>
                 <a:cs typeface="Arial"/>
               </a:rPr>
-              <a:t>下一步计划 · 模型构建</a:t>
+              <a:t>工作进度</a:t>
             </a:r>
           </a:p>
         </p:txBody>
       </p:sp>
       <p:pic>
         <p:nvPicPr>
-          <p:cNvPr id="4" name="Picture 3" descr="fig7_模型结构.png"/>
+          <p:cNvPr id="4" name="Picture 3" descr="figG_进度甘特.png"/>
           <p:cNvPicPr>
             <a:picLocks noChangeAspect="1"/>
           </p:cNvPicPr>
@@ -3927,8 +3835,8 @@
         </p:blipFill>
         <p:spPr>
           <a:xfrm>
-            <a:off x="566928" y="1481328"/>
-            <a:ext cx="11057839" cy="3632698"/>
+            <a:off x="1706007" y="1435608"/>
+            <a:ext cx="8779680" cy="3063240"/>
           </a:xfrm>
           <a:prstGeom prst="rect">
             <a:avLst/>
@@ -3937,7 +3845,54 @@
       </p:pic>
       <p:sp>
         <p:nvSpPr>
-          <p:cNvPr id="5" name="Rounded Rectangle 4"/>
+          <p:cNvPr id="5" name="TextBox 4"/>
+          <p:cNvSpPr txBox="1"/>
+          <p:nvPr/>
+        </p:nvSpPr>
+        <p:spPr>
+          <a:xfrm>
+            <a:off x="566928" y="4709160"/>
+            <a:ext cx="11057839" cy="914400"/>
+          </a:xfrm>
+          <a:prstGeom prst="rect">
+            <a:avLst/>
+          </a:prstGeom>
+          <a:noFill/>
+        </p:spPr>
+        <p:txBody>
+          <a:bodyPr wrap="square" anchor="t" lIns="36576" rIns="36576" tIns="0" bIns="0">
+            <a:spAutoFit/>
+          </a:bodyPr>
+          <a:lstStyle/>
+          <a:p>
+            <a:pPr algn="l">
+              <a:lnSpc>
+                <a:spcPct val="125000"/>
+              </a:lnSpc>
+              <a:spcBef>
+                <a:spcPts val="0"/>
+              </a:spcBef>
+              <a:spcAft>
+                <a:spcPts val="0"/>
+              </a:spcAft>
+            </a:pPr>
+            <a:r>
+              <a:rPr sz="1650" b="0">
+                <a:solidFill>
+                  <a:srgbClr val="12324F"/>
+                </a:solidFill>
+                <a:latin typeface="Arial"/>
+                <a:ea typeface="微软雅黑"/>
+                <a:cs typeface="Arial"/>
+              </a:rPr>
+              <a:t>数据资源、短肽库、三模型共识预测、分阶段差异分析与宏蛋白组去重均已完成；当前处于机制关联与抑菌实验验证阶段，论文撰写同步推进。</a:t>
+            </a:r>
+          </a:p>
+        </p:txBody>
+      </p:sp>
+      <p:sp>
+        <p:nvSpPr>
+          <p:cNvPr id="6" name="Rounded Rectangle 5"/>
           <p:cNvSpPr/>
           <p:nvPr/>
         </p:nvSpPr>
@@ -3999,14 +3954,14 @@
                 <a:ea typeface="微软雅黑"/>
                 <a:cs typeface="Arial"/>
               </a:rPr>
-              <a:t>模型以 ESM-2 序列表征为核心，结合注意力池化与 Focal Loss 应对正负样本不平衡</a:t>
-            </a:r>
-          </a:p>
-        </p:txBody>
-      </p:sp>
-      <p:sp>
-        <p:nvSpPr>
-          <p:cNvPr id="6" name="TextBox 5"/>
+              <a:t>前五项已完成，后两项正在推进，整体进度与开题计划一致</a:t>
+            </a:r>
+          </a:p>
+        </p:txBody>
+      </p:sp>
+      <p:sp>
+        <p:nvSpPr>
+          <p:cNvPr id="7" name="TextBox 6"/>
           <p:cNvSpPr txBox="1"/>
           <p:nvPr/>
         </p:nvSpPr>
@@ -4053,7 +4008,7 @@
       </p:sp>
       <p:sp>
         <p:nvSpPr>
-          <p:cNvPr id="7" name="TextBox 6"/>
+          <p:cNvPr id="8" name="TextBox 7"/>
           <p:cNvSpPr txBox="1"/>
           <p:nvPr/>
         </p:nvSpPr>
@@ -4158,7 +4113,7 @@
                 <a:ea typeface="微软雅黑"/>
                 <a:cs typeface="Arial"/>
               </a:rPr>
-              <a:t>下一步 ②：全量推理与四队列差异分析方案</a:t>
+              <a:t>后续安排：四项收尾工作</a:t>
             </a:r>
           </a:p>
         </p:txBody>
@@ -4205,7 +4160,7 @@
                 <a:ea typeface="微软雅黑"/>
                 <a:cs typeface="Arial"/>
               </a:rPr>
-              <a:t>下一步计划 · 分析方案</a:t>
+              <a:t>下一步计划</a:t>
             </a:r>
           </a:p>
         </p:txBody>
@@ -4218,7 +4173,7 @@
         </p:nvSpPr>
         <p:spPr>
           <a:xfrm>
-            <a:off x="566928" y="1481328"/>
+            <a:off x="566928" y="1572768"/>
             <a:ext cx="11057839" cy="3840480"/>
           </a:xfrm>
           <a:prstGeom prst="rect">
@@ -4234,17 +4189,17 @@
           <a:p>
             <a:pPr algn="l">
               <a:lnSpc>
-                <a:spcPct val="122000"/>
-              </a:lnSpc>
-              <a:spcBef>
-                <a:spcPts val="0"/>
-              </a:spcBef>
-              <a:spcAft>
-                <a:spcPts val="0"/>
-              </a:spcAft>
-            </a:pPr>
-            <a:r>
-              <a:rPr sz="1650" b="1">
+                <a:spcPct val="125000"/>
+              </a:lnSpc>
+              <a:spcBef>
+                <a:spcPts val="0"/>
+              </a:spcBef>
+              <a:spcAft>
+                <a:spcPts val="0"/>
+              </a:spcAft>
+            </a:pPr>
+            <a:r>
+              <a:rPr sz="1700" b="1">
                 <a:solidFill>
                   <a:srgbClr val="E08A2E"/>
                 </a:solidFill>
@@ -4252,10 +4207,10 @@
                 <a:ea typeface="微软雅黑"/>
                 <a:cs typeface="Arial"/>
               </a:rPr>
-              <a:t>1. 批量推理　</a:t>
-            </a:r>
-            <a:r>
-              <a:rPr sz="1650" b="0">
+              <a:t>1. 机制关联分析　</a:t>
+            </a:r>
+            <a:r>
+              <a:rPr sz="1700" b="0">
                 <a:solidFill>
                   <a:srgbClr val="12324F"/>
                 </a:solidFill>
@@ -4263,23 +4218,23 @@
                 <a:ea typeface="微软雅黑"/>
                 <a:cs typeface="Arial"/>
               </a:rPr>
-              <a:t>对 9 139.2 万条多肽分批预测，按验证集阈值筛选高置信度候选；与 DRAMP / APD3 / AMPSphere 比对剔除已知家族，保留新颖候选。</a:t>
-            </a:r>
-          </a:p>
-          <a:p>
-            <a:pPr algn="l">
-              <a:lnSpc>
-                <a:spcPct val="122000"/>
-              </a:lnSpc>
-              <a:spcBef>
-                <a:spcPts val="1500"/>
-              </a:spcBef>
-              <a:spcAft>
-                <a:spcPts val="0"/>
-              </a:spcAft>
-            </a:pPr>
-            <a:r>
-              <a:rPr sz="1650" b="1">
+              <a:t>完成特有抗菌肽与 Aβ 聚集、AChE 结合及炎症通路的关联分析，形成候选肽清单。</a:t>
+            </a:r>
+          </a:p>
+          <a:p>
+            <a:pPr algn="l">
+              <a:lnSpc>
+                <a:spcPct val="125000"/>
+              </a:lnSpc>
+              <a:spcBef>
+                <a:spcPts val="1800"/>
+              </a:spcBef>
+              <a:spcAft>
+                <a:spcPts val="0"/>
+              </a:spcAft>
+            </a:pPr>
+            <a:r>
+              <a:rPr sz="1700" b="1">
                 <a:solidFill>
                   <a:srgbClr val="E08A2E"/>
                 </a:solidFill>
@@ -4287,10 +4242,10 @@
                 <a:ea typeface="微软雅黑"/>
                 <a:cs typeface="Arial"/>
               </a:rPr>
-              <a:t>2. 丰度定量　</a:t>
-            </a:r>
-            <a:r>
-              <a:rPr sz="1650" b="0">
+              <a:t>2. 抑菌实验验证　</a:t>
+            </a:r>
+            <a:r>
+              <a:rPr sz="1700" b="0">
                 <a:solidFill>
                   <a:srgbClr val="12324F"/>
                 </a:solidFill>
@@ -4298,23 +4253,23 @@
                 <a:ea typeface="微软雅黑"/>
                 <a:cs typeface="Arial"/>
               </a:rPr>
-              <a:t>以 Bowtie2/BWA 将各样本 clean reads 回贴至 1 971 个代表基因组，CoverM 计算候选 sORF 覆盖度与丰度，构建样本 × 候选多肽矩阵并做 CLR 变换。</a:t>
-            </a:r>
-          </a:p>
-          <a:p>
-            <a:pPr algn="l">
-              <a:lnSpc>
-                <a:spcPct val="122000"/>
-              </a:lnSpc>
-              <a:spcBef>
-                <a:spcPts val="1500"/>
-              </a:spcBef>
-              <a:spcAft>
-                <a:spcPts val="0"/>
-              </a:spcAft>
-            </a:pPr>
-            <a:r>
-              <a:rPr sz="1650" b="1">
+              <a:t>完成候选肽的合成与抑菌实验，获得活性初筛结果。</a:t>
+            </a:r>
+          </a:p>
+          <a:p>
+            <a:pPr algn="l">
+              <a:lnSpc>
+                <a:spcPct val="125000"/>
+              </a:lnSpc>
+              <a:spcBef>
+                <a:spcPts val="1800"/>
+              </a:spcBef>
+              <a:spcAft>
+                <a:spcPts val="0"/>
+              </a:spcAft>
+            </a:pPr>
+            <a:r>
+              <a:rPr sz="1700" b="1">
                 <a:solidFill>
                   <a:srgbClr val="E08A2E"/>
                 </a:solidFill>
@@ -4322,10 +4277,10 @@
                 <a:ea typeface="微软雅黑"/>
                 <a:cs typeface="Arial"/>
               </a:rPr>
-              <a:t>3. 组间差异分析　</a:t>
-            </a:r>
-            <a:r>
-              <a:rPr sz="1650" b="0">
+              <a:t>3. 结果整理　</a:t>
+            </a:r>
+            <a:r>
+              <a:rPr sz="1700" b="0">
                 <a:solidFill>
                   <a:srgbClr val="12324F"/>
                 </a:solidFill>
@@ -4333,23 +4288,23 @@
                 <a:ea typeface="微软雅黑"/>
                 <a:cs typeface="Arial"/>
               </a:rPr>
-              <a:t>四个队列分别用 Kruskal-Wallis H（五阶段）与 Mann-Whitney U（NC-AD）检验，以 BH 法控制错误发现率（FDR），以 Cliff's delta 报告效应量；PCoA 与 PERMANOVA 评估整体组成差异，随机森林评估判别能力。</a:t>
-            </a:r>
-          </a:p>
-          <a:p>
-            <a:pPr algn="l">
-              <a:lnSpc>
-                <a:spcPct val="122000"/>
-              </a:lnSpc>
-              <a:spcBef>
-                <a:spcPts val="1500"/>
-              </a:spcBef>
-              <a:spcAft>
-                <a:spcPts val="0"/>
-              </a:spcAft>
-            </a:pPr>
-            <a:r>
-              <a:rPr sz="1650" b="1">
+              <a:t>整理候选抗菌肽、特有肽与验证结果，形成完整的图表与结论。</a:t>
+            </a:r>
+          </a:p>
+          <a:p>
+            <a:pPr algn="l">
+              <a:lnSpc>
+                <a:spcPct val="125000"/>
+              </a:lnSpc>
+              <a:spcBef>
+                <a:spcPts val="1800"/>
+              </a:spcBef>
+              <a:spcAft>
+                <a:spcPts val="0"/>
+              </a:spcAft>
+            </a:pPr>
+            <a:r>
+              <a:rPr sz="1700" b="1">
                 <a:solidFill>
                   <a:srgbClr val="E08A2E"/>
                 </a:solidFill>
@@ -4357,10 +4312,10 @@
                 <a:ea typeface="微软雅黑"/>
                 <a:cs typeface="Arial"/>
               </a:rPr>
-              <a:t>4. 趋势与可解释性　</a:t>
-            </a:r>
-            <a:r>
-              <a:rPr sz="1650" b="0">
+              <a:t>4. 论文撰写　</a:t>
+            </a:r>
+            <a:r>
+              <a:rPr sz="1700" b="0">
                 <a:solidFill>
                   <a:srgbClr val="12324F"/>
                 </a:solidFill>
@@ -4368,7 +4323,7 @@
                 <a:ea typeface="微软雅黑"/>
                 <a:cs typeface="Arial"/>
               </a:rPr>
-              <a:t>Jonckheere-Terpstra 检验评估随病程的单调趋势；与 MMSE、MoCA 评分做偏相关（校正年龄、性别、BMI 与用药）；注意力权重与 SHAP 定位关键位点，MEME 挖掘保守基序。</a:t>
+              <a:t>完成学位论文撰写与投稿论文准备，按计划申请预答辩。</a:t>
             </a:r>
           </a:p>
         </p:txBody>
@@ -4437,7 +4392,7 @@
                 <a:ea typeface="微软雅黑"/>
                 <a:cs typeface="Arial"/>
               </a:rPr>
-              <a:t>沿用已完成的数据资源与统计框架，无需重复数据生产，剩余工作量可控</a:t>
+              <a:t>收尾工作集中在分析结论与实验验证，不再涉及大规模数据生产</a:t>
             </a:r>
           </a:p>
         </p:txBody>
@@ -4596,7 +4551,7 @@
                 <a:ea typeface="微软雅黑"/>
                 <a:cs typeface="Arial"/>
               </a:rPr>
-              <a:t>研究进度：整体约 65%，与开题计划一致</a:t>
+              <a:t>与开题计划的对应关系</a:t>
             </a:r>
           </a:p>
         </p:txBody>
@@ -4643,35 +4598,209 @@
                 <a:ea typeface="微软雅黑"/>
                 <a:cs typeface="Arial"/>
               </a:rPr>
-              <a:t>研究进度与工作量</a:t>
-            </a:r>
-          </a:p>
-        </p:txBody>
-      </p:sp>
-      <p:pic>
-        <p:nvPicPr>
-          <p:cNvPr id="4" name="Picture 3" descr="fig6_进度甘特.png"/>
-          <p:cNvPicPr>
-            <a:picLocks noChangeAspect="1"/>
-          </p:cNvPicPr>
-          <p:nvPr/>
-        </p:nvPicPr>
-        <p:blipFill>
-          <a:blip r:embed="rId2"/>
-          <a:stretch>
-            <a:fillRect/>
-          </a:stretch>
-        </p:blipFill>
-        <p:spPr>
-          <a:xfrm>
-            <a:off x="566928" y="1481328"/>
-            <a:ext cx="11057839" cy="3847965"/>
+              <a:t>工作对照</a:t>
+            </a:r>
+          </a:p>
+        </p:txBody>
+      </p:sp>
+      <p:sp>
+        <p:nvSpPr>
+          <p:cNvPr id="4" name="TextBox 3"/>
+          <p:cNvSpPr txBox="1"/>
+          <p:nvPr/>
+        </p:nvSpPr>
+        <p:spPr>
+          <a:xfrm>
+            <a:off x="566928" y="1527048"/>
+            <a:ext cx="11057839" cy="3931920"/>
           </a:xfrm>
           <a:prstGeom prst="rect">
             <a:avLst/>
           </a:prstGeom>
-        </p:spPr>
-      </p:pic>
+          <a:noFill/>
+        </p:spPr>
+        <p:txBody>
+          <a:bodyPr wrap="square" anchor="t" lIns="36576" rIns="36576" tIns="0" bIns="0">
+            <a:spAutoFit/>
+          </a:bodyPr>
+          <a:lstStyle/>
+          <a:p>
+            <a:pPr algn="l">
+              <a:lnSpc>
+                <a:spcPct val="125000"/>
+              </a:lnSpc>
+              <a:spcBef>
+                <a:spcPts val="0"/>
+              </a:spcBef>
+              <a:spcAft>
+                <a:spcPts val="0"/>
+              </a:spcAft>
+            </a:pPr>
+            <a:r>
+              <a:rPr sz="1650" b="1">
+                <a:solidFill>
+                  <a:srgbClr val="2F9E8F"/>
+                </a:solidFill>
+                <a:latin typeface="Arial"/>
+                <a:ea typeface="微软雅黑"/>
+                <a:cs typeface="Arial"/>
+              </a:rPr>
+              <a:t>数据准备　</a:t>
+            </a:r>
+            <a:r>
+              <a:rPr sz="1650" b="0">
+                <a:solidFill>
+                  <a:srgbClr val="12324F"/>
+                </a:solidFill>
+                <a:latin typeface="Arial"/>
+                <a:ea typeface="微软雅黑"/>
+                <a:cs typeface="Arial"/>
+              </a:rPr>
+              <a:t>开题计划使用公开宏基因组数据 → 已完成全队列数据处理与参考集构建</a:t>
+            </a:r>
+          </a:p>
+          <a:p>
+            <a:pPr algn="l">
+              <a:lnSpc>
+                <a:spcPct val="125000"/>
+              </a:lnSpc>
+              <a:spcBef>
+                <a:spcPts val="1600"/>
+              </a:spcBef>
+              <a:spcAft>
+                <a:spcPts val="0"/>
+              </a:spcAft>
+            </a:pPr>
+            <a:r>
+              <a:rPr sz="1650" b="1">
+                <a:solidFill>
+                  <a:srgbClr val="2F9E8F"/>
+                </a:solidFill>
+                <a:latin typeface="Arial"/>
+                <a:ea typeface="微软雅黑"/>
+                <a:cs typeface="Arial"/>
+              </a:rPr>
+              <a:t>候选肽挖掘　</a:t>
+            </a:r>
+            <a:r>
+              <a:rPr sz="1650" b="0">
+                <a:solidFill>
+                  <a:srgbClr val="12324F"/>
+                </a:solidFill>
+                <a:latin typeface="Arial"/>
+                <a:ea typeface="微软雅黑"/>
+                <a:cs typeface="Arial"/>
+              </a:rPr>
+              <a:t>开题计划提取 sORF 并预测抗菌肽 → 已完成短肽库构建与三模型共识预测</a:t>
+            </a:r>
+          </a:p>
+          <a:p>
+            <a:pPr algn="l">
+              <a:lnSpc>
+                <a:spcPct val="125000"/>
+              </a:lnSpc>
+              <a:spcBef>
+                <a:spcPts val="1600"/>
+              </a:spcBef>
+              <a:spcAft>
+                <a:spcPts val="0"/>
+              </a:spcAft>
+            </a:pPr>
+            <a:r>
+              <a:rPr sz="1650" b="1">
+                <a:solidFill>
+                  <a:srgbClr val="2F9E8F"/>
+                </a:solidFill>
+                <a:latin typeface="Arial"/>
+                <a:ea typeface="微软雅黑"/>
+                <a:cs typeface="Arial"/>
+              </a:rPr>
+              <a:t>差异分析　</a:t>
+            </a:r>
+            <a:r>
+              <a:rPr sz="1650" b="0">
+                <a:solidFill>
+                  <a:srgbClr val="12324F"/>
+                </a:solidFill>
+                <a:latin typeface="Arial"/>
+                <a:ea typeface="微软雅黑"/>
+                <a:cs typeface="Arial"/>
+              </a:rPr>
+              <a:t>开题计划按病程阶段比较 → 已完成分阶段差异分析，并新增宏蛋白组二次去重</a:t>
+            </a:r>
+          </a:p>
+          <a:p>
+            <a:pPr algn="l">
+              <a:lnSpc>
+                <a:spcPct val="125000"/>
+              </a:lnSpc>
+              <a:spcBef>
+                <a:spcPts val="1600"/>
+              </a:spcBef>
+              <a:spcAft>
+                <a:spcPts val="0"/>
+              </a:spcAft>
+            </a:pPr>
+            <a:r>
+              <a:rPr sz="1650" b="1">
+                <a:solidFill>
+                  <a:srgbClr val="2F9E8F"/>
+                </a:solidFill>
+                <a:latin typeface="Arial"/>
+                <a:ea typeface="微软雅黑"/>
+                <a:cs typeface="Arial"/>
+              </a:rPr>
+              <a:t>模型方案　</a:t>
+            </a:r>
+            <a:r>
+              <a:rPr sz="1650" b="0">
+                <a:solidFill>
+                  <a:srgbClr val="12324F"/>
+                </a:solidFill>
+                <a:latin typeface="Arial"/>
+                <a:ea typeface="微软雅黑"/>
+                <a:cs typeface="Arial"/>
+              </a:rPr>
+              <a:t>开题拟构建 DeepMetaAMP → 实际采用 Attention / LSTM / BERT 三个已发表模型协同预测</a:t>
+            </a:r>
+          </a:p>
+          <a:p>
+            <a:pPr algn="l">
+              <a:lnSpc>
+                <a:spcPct val="125000"/>
+              </a:lnSpc>
+              <a:spcBef>
+                <a:spcPts val="1600"/>
+              </a:spcBef>
+              <a:spcAft>
+                <a:spcPts val="0"/>
+              </a:spcAft>
+            </a:pPr>
+            <a:r>
+              <a:rPr sz="1650" b="1">
+                <a:solidFill>
+                  <a:srgbClr val="2F9E8F"/>
+                </a:solidFill>
+                <a:latin typeface="Arial"/>
+                <a:ea typeface="微软雅黑"/>
+                <a:cs typeface="Arial"/>
+              </a:rPr>
+              <a:t>机制与验证　</a:t>
+            </a:r>
+            <a:r>
+              <a:rPr sz="1650" b="0">
+                <a:solidFill>
+                  <a:srgbClr val="12324F"/>
+                </a:solidFill>
+                <a:latin typeface="Arial"/>
+                <a:ea typeface="微软雅黑"/>
+                <a:cs typeface="Arial"/>
+              </a:rPr>
+              <a:t>开题拟做功能与可视化分析 → 下一步进行机制关联与极简抑菌实验</a:t>
+            </a:r>
+          </a:p>
+        </p:txBody>
+      </p:sp>
       <p:sp>
         <p:nvSpPr>
           <p:cNvPr id="5" name="Rounded Rectangle 4"/>
@@ -4736,7 +4865,7 @@
                 <a:ea typeface="微软雅黑"/>
                 <a:cs typeface="Arial"/>
               </a:rPr>
-              <a:t>前 5 项任务全部完成（100%）；模型训练已完成数据集整理与框架搭建，完成度约 35%</a:t>
+              <a:t>研究方向未变，仅在预测模型与去重环节做了更务实的调整</a:t>
             </a:r>
           </a:p>
         </p:txBody>
@@ -4895,7 +5024,7 @@
                 <a:ea typeface="微软雅黑"/>
                 <a:cs typeface="Arial"/>
               </a:rPr>
-              <a:t>剩余约 35% 工作的安排与交付物</a:t>
+              <a:t>存在问题与应对措施</a:t>
             </a:r>
           </a:p>
         </p:txBody>
@@ -4942,45 +5071,21 @@
                 <a:ea typeface="微软雅黑"/>
                 <a:cs typeface="Arial"/>
               </a:rPr>
-              <a:t>下一步计划</a:t>
-            </a:r>
-          </a:p>
-        </p:txBody>
-      </p:sp>
-      <p:pic>
-        <p:nvPicPr>
-          <p:cNvPr id="4" name="Picture 3" descr="fig8_下一步计划.png"/>
-          <p:cNvPicPr>
-            <a:picLocks noChangeAspect="1"/>
-          </p:cNvPicPr>
-          <p:nvPr/>
-        </p:nvPicPr>
-        <p:blipFill>
-          <a:blip r:embed="rId2"/>
-          <a:stretch>
-            <a:fillRect/>
-          </a:stretch>
-        </p:blipFill>
-        <p:spPr>
-          <a:xfrm>
-            <a:off x="566928" y="1481328"/>
-            <a:ext cx="11057839" cy="3525051"/>
-          </a:xfrm>
-          <a:prstGeom prst="rect">
-            <a:avLst/>
-          </a:prstGeom>
-        </p:spPr>
-      </p:pic>
-      <p:sp>
-        <p:nvSpPr>
-          <p:cNvPr id="5" name="Rounded Rectangle 4"/>
+              <a:t>问题与对策</a:t>
+            </a:r>
+          </a:p>
+        </p:txBody>
+      </p:sp>
+      <p:sp>
+        <p:nvSpPr>
+          <p:cNvPr id="4" name="Rounded Rectangle 3"/>
           <p:cNvSpPr/>
           <p:nvPr/>
         </p:nvSpPr>
         <p:spPr>
           <a:xfrm>
-            <a:off x="566928" y="5760720"/>
-            <a:ext cx="11057839" cy="548640"/>
+            <a:off x="566928" y="1527048"/>
+            <a:ext cx="11057839" cy="1170432"/>
           </a:xfrm>
           <a:prstGeom prst="roundRect">
             <a:avLst>
@@ -4988,11 +5093,11 @@
             </a:avLst>
           </a:prstGeom>
           <a:solidFill>
-            <a:srgbClr val="ECF7F4"/>
+            <a:srgbClr val="FDF2E3"/>
           </a:solidFill>
           <a:ln w="15875">
             <a:solidFill>
-              <a:srgbClr val="2F9E8F"/>
+              <a:srgbClr val="E08A2E"/>
             </a:solidFill>
           </a:ln>
           <a:effectLst/>
@@ -5012,6 +5117,285 @@
           </a:fontRef>
         </p:style>
         <p:txBody>
+          <a:bodyPr rtlCol="0" anchor="ctr" wrap="square" lIns="182880" rIns="182880"/>
+          <a:lstStyle/>
+          <a:p>
+            <a:pPr algn="l">
+              <a:lnSpc>
+                <a:spcPct val="112000"/>
+              </a:lnSpc>
+              <a:spcBef>
+                <a:spcPts val="0"/>
+              </a:spcBef>
+              <a:spcAft>
+                <a:spcPts val="400"/>
+              </a:spcAft>
+            </a:pPr>
+            <a:r>
+              <a:rPr sz="1700" b="1">
+                <a:solidFill>
+                  <a:srgbClr val="12324F"/>
+                </a:solidFill>
+                <a:latin typeface="Arial"/>
+                <a:ea typeface="微软雅黑"/>
+                <a:cs typeface="Arial"/>
+              </a:rPr>
+              <a:t>问题 1　预测结果存在假阳性风险</a:t>
+            </a:r>
+          </a:p>
+          <a:p>
+            <a:pPr algn="l">
+              <a:lnSpc>
+                <a:spcPct val="112000"/>
+              </a:lnSpc>
+              <a:spcBef>
+                <a:spcPts val="0"/>
+              </a:spcBef>
+              <a:spcAft>
+                <a:spcPts val="0"/>
+              </a:spcAft>
+            </a:pPr>
+            <a:r>
+              <a:rPr sz="1650" b="0">
+                <a:solidFill>
+                  <a:srgbClr val="12324F"/>
+                </a:solidFill>
+                <a:latin typeface="Arial"/>
+                <a:ea typeface="微软雅黑"/>
+                <a:cs typeface="Arial"/>
+              </a:rPr>
+              <a:t>应对：三模型共识判定提高可信度，再用宏蛋白组表达证据二次去重，最后以抑菌实验做最小验证。</a:t>
+            </a:r>
+          </a:p>
+        </p:txBody>
+      </p:sp>
+      <p:sp>
+        <p:nvSpPr>
+          <p:cNvPr id="5" name="Rounded Rectangle 4"/>
+          <p:cNvSpPr/>
+          <p:nvPr/>
+        </p:nvSpPr>
+        <p:spPr>
+          <a:xfrm>
+            <a:off x="566928" y="2825496"/>
+            <a:ext cx="11057839" cy="1170432"/>
+          </a:xfrm>
+          <a:prstGeom prst="roundRect">
+            <a:avLst>
+              <a:gd name="adj" fmla="val 8000"/>
+            </a:avLst>
+          </a:prstGeom>
+          <a:solidFill>
+            <a:srgbClr val="FDF2E3"/>
+          </a:solidFill>
+          <a:ln w="15875">
+            <a:solidFill>
+              <a:srgbClr val="E08A2E"/>
+            </a:solidFill>
+          </a:ln>
+          <a:effectLst/>
+        </p:spPr>
+        <p:style>
+          <a:lnRef idx="1">
+            <a:schemeClr val="accent1"/>
+          </a:lnRef>
+          <a:fillRef idx="3">
+            <a:schemeClr val="accent1"/>
+          </a:fillRef>
+          <a:effectRef idx="2">
+            <a:schemeClr val="accent1"/>
+          </a:effectRef>
+          <a:fontRef idx="minor">
+            <a:schemeClr val="lt1"/>
+          </a:fontRef>
+        </p:style>
+        <p:txBody>
+          <a:bodyPr rtlCol="0" anchor="ctr" wrap="square" lIns="182880" rIns="182880"/>
+          <a:lstStyle/>
+          <a:p>
+            <a:pPr algn="l">
+              <a:lnSpc>
+                <a:spcPct val="112000"/>
+              </a:lnSpc>
+              <a:spcBef>
+                <a:spcPts val="0"/>
+              </a:spcBef>
+              <a:spcAft>
+                <a:spcPts val="400"/>
+              </a:spcAft>
+            </a:pPr>
+            <a:r>
+              <a:rPr sz="1700" b="1">
+                <a:solidFill>
+                  <a:srgbClr val="12324F"/>
+                </a:solidFill>
+                <a:latin typeface="Arial"/>
+                <a:ea typeface="微软雅黑"/>
+                <a:cs typeface="Arial"/>
+              </a:rPr>
+              <a:t>问题 2　部分样本缺少可用的参考基因组</a:t>
+            </a:r>
+          </a:p>
+          <a:p>
+            <a:pPr algn="l">
+              <a:lnSpc>
+                <a:spcPct val="112000"/>
+              </a:lnSpc>
+              <a:spcBef>
+                <a:spcPts val="0"/>
+              </a:spcBef>
+              <a:spcAft>
+                <a:spcPts val="0"/>
+              </a:spcAft>
+            </a:pPr>
+            <a:r>
+              <a:rPr sz="1650" b="0">
+                <a:solidFill>
+                  <a:srgbClr val="12324F"/>
+                </a:solidFill>
+                <a:latin typeface="Arial"/>
+                <a:ea typeface="微软雅黑"/>
+                <a:cs typeface="Arial"/>
+              </a:rPr>
+              <a:t>应对：在丰度分析阶段改用全量基因组回贴，恢复样本覆盖，避免参考集筛选造成样本缺失。</a:t>
+            </a:r>
+          </a:p>
+        </p:txBody>
+      </p:sp>
+      <p:sp>
+        <p:nvSpPr>
+          <p:cNvPr id="6" name="Rounded Rectangle 5"/>
+          <p:cNvSpPr/>
+          <p:nvPr/>
+        </p:nvSpPr>
+        <p:spPr>
+          <a:xfrm>
+            <a:off x="566928" y="4123944"/>
+            <a:ext cx="11057839" cy="1170432"/>
+          </a:xfrm>
+          <a:prstGeom prst="roundRect">
+            <a:avLst>
+              <a:gd name="adj" fmla="val 8000"/>
+            </a:avLst>
+          </a:prstGeom>
+          <a:solidFill>
+            <a:srgbClr val="FDF2E3"/>
+          </a:solidFill>
+          <a:ln w="15875">
+            <a:solidFill>
+              <a:srgbClr val="E08A2E"/>
+            </a:solidFill>
+          </a:ln>
+          <a:effectLst/>
+        </p:spPr>
+        <p:style>
+          <a:lnRef idx="1">
+            <a:schemeClr val="accent1"/>
+          </a:lnRef>
+          <a:fillRef idx="3">
+            <a:schemeClr val="accent1"/>
+          </a:fillRef>
+          <a:effectRef idx="2">
+            <a:schemeClr val="accent1"/>
+          </a:effectRef>
+          <a:fontRef idx="minor">
+            <a:schemeClr val="lt1"/>
+          </a:fontRef>
+        </p:style>
+        <p:txBody>
+          <a:bodyPr rtlCol="0" anchor="ctr" wrap="square" lIns="182880" rIns="182880"/>
+          <a:lstStyle/>
+          <a:p>
+            <a:pPr algn="l">
+              <a:lnSpc>
+                <a:spcPct val="112000"/>
+              </a:lnSpc>
+              <a:spcBef>
+                <a:spcPts val="0"/>
+              </a:spcBef>
+              <a:spcAft>
+                <a:spcPts val="400"/>
+              </a:spcAft>
+            </a:pPr>
+            <a:r>
+              <a:rPr sz="1700" b="1">
+                <a:solidFill>
+                  <a:srgbClr val="12324F"/>
+                </a:solidFill>
+                <a:latin typeface="Arial"/>
+                <a:ea typeface="微软雅黑"/>
+                <a:cs typeface="Arial"/>
+              </a:rPr>
+              <a:t>问题 3　机制关联的证据强度有限</a:t>
+            </a:r>
+          </a:p>
+          <a:p>
+            <a:pPr algn="l">
+              <a:lnSpc>
+                <a:spcPct val="112000"/>
+              </a:lnSpc>
+              <a:spcBef>
+                <a:spcPts val="0"/>
+              </a:spcBef>
+              <a:spcAft>
+                <a:spcPts val="0"/>
+              </a:spcAft>
+            </a:pPr>
+            <a:r>
+              <a:rPr sz="1650" b="0">
+                <a:solidFill>
+                  <a:srgbClr val="12324F"/>
+                </a:solidFill>
+                <a:latin typeface="Arial"/>
+                <a:ea typeface="微软雅黑"/>
+                <a:cs typeface="Arial"/>
+              </a:rPr>
+              <a:t>应对：以对接与分子模拟、文献比对为主，明确研究定位为“线索发现”，不夸大因果结论。</a:t>
+            </a:r>
+          </a:p>
+        </p:txBody>
+      </p:sp>
+      <p:sp>
+        <p:nvSpPr>
+          <p:cNvPr id="7" name="Rounded Rectangle 6"/>
+          <p:cNvSpPr/>
+          <p:nvPr/>
+        </p:nvSpPr>
+        <p:spPr>
+          <a:xfrm>
+            <a:off x="566928" y="5760720"/>
+            <a:ext cx="11057839" cy="548640"/>
+          </a:xfrm>
+          <a:prstGeom prst="roundRect">
+            <a:avLst>
+              <a:gd name="adj" fmla="val 8000"/>
+            </a:avLst>
+          </a:prstGeom>
+          <a:solidFill>
+            <a:srgbClr val="ECF7F4"/>
+          </a:solidFill>
+          <a:ln w="15875">
+            <a:solidFill>
+              <a:srgbClr val="2F9E8F"/>
+            </a:solidFill>
+          </a:ln>
+          <a:effectLst/>
+        </p:spPr>
+        <p:style>
+          <a:lnRef idx="1">
+            <a:schemeClr val="accent1"/>
+          </a:lnRef>
+          <a:fillRef idx="3">
+            <a:schemeClr val="accent1"/>
+          </a:fillRef>
+          <a:effectRef idx="2">
+            <a:schemeClr val="accent1"/>
+          </a:effectRef>
+          <a:fontRef idx="minor">
+            <a:schemeClr val="lt1"/>
+          </a:fontRef>
+        </p:style>
+        <p:txBody>
           <a:bodyPr rtlCol="0" anchor="ctr" wrap="square" lIns="164592" rIns="164592"/>
           <a:lstStyle/>
           <a:p>
@@ -5035,14 +5419,14 @@
                 <a:ea typeface="微软雅黑"/>
                 <a:cs typeface="Arial"/>
               </a:rPr>
-              <a:t>论文撰写与预答辩安排在最后阶段，计划 2027 年 1—3 月完成学位论文初稿</a:t>
-            </a:r>
-          </a:p>
-        </p:txBody>
-      </p:sp>
-      <p:sp>
-        <p:nvSpPr>
-          <p:cNvPr id="6" name="TextBox 5"/>
+              <a:t>三个问题都有具体对策，不影响整体进度</a:t>
+            </a:r>
+          </a:p>
+        </p:txBody>
+      </p:sp>
+      <p:sp>
+        <p:nvSpPr>
+          <p:cNvPr id="8" name="TextBox 7"/>
           <p:cNvSpPr txBox="1"/>
           <p:nvPr/>
         </p:nvSpPr>
@@ -5089,7 +5473,7 @@
       </p:sp>
       <p:sp>
         <p:nvSpPr>
-          <p:cNvPr id="7" name="TextBox 6"/>
+          <p:cNvPr id="9" name="TextBox 8"/>
           <p:cNvSpPr txBox="1"/>
           <p:nvPr/>
         </p:nvSpPr>
@@ -5194,7 +5578,7 @@
                 <a:ea typeface="微软雅黑"/>
                 <a:cs typeface="Arial"/>
               </a:rPr>
-              <a:t>存在问题与应对措施</a:t>
+              <a:t>预期成果</a:t>
             </a:r>
           </a:p>
         </p:txBody>
@@ -5241,21 +5625,219 @@
                 <a:ea typeface="微软雅黑"/>
                 <a:cs typeface="Arial"/>
               </a:rPr>
-              <a:t>问题与对策</a:t>
-            </a:r>
-          </a:p>
-        </p:txBody>
-      </p:sp>
-      <p:sp>
-        <p:nvSpPr>
-          <p:cNvPr id="4" name="Rounded Rectangle 3"/>
+              <a:t>成果形式</a:t>
+            </a:r>
+          </a:p>
+        </p:txBody>
+      </p:sp>
+      <p:sp>
+        <p:nvSpPr>
+          <p:cNvPr id="4" name="TextBox 3"/>
+          <p:cNvSpPr txBox="1"/>
+          <p:nvPr/>
+        </p:nvSpPr>
+        <p:spPr>
+          <a:xfrm>
+            <a:off x="566928" y="1618488"/>
+            <a:ext cx="11057839" cy="4050792"/>
+          </a:xfrm>
+          <a:prstGeom prst="rect">
+            <a:avLst/>
+          </a:prstGeom>
+          <a:noFill/>
+        </p:spPr>
+        <p:txBody>
+          <a:bodyPr wrap="square" anchor="t" lIns="36576" rIns="36576" tIns="0" bIns="0">
+            <a:spAutoFit/>
+          </a:bodyPr>
+          <a:lstStyle/>
+          <a:p>
+            <a:pPr algn="l">
+              <a:lnSpc>
+                <a:spcPct val="125000"/>
+              </a:lnSpc>
+              <a:spcBef>
+                <a:spcPts val="0"/>
+              </a:spcBef>
+              <a:spcAft>
+                <a:spcPts val="0"/>
+              </a:spcAft>
+            </a:pPr>
+            <a:r>
+              <a:rPr sz="1750" b="0">
+                <a:solidFill>
+                  <a:srgbClr val="2F6FB0"/>
+                </a:solidFill>
+                <a:latin typeface="Arial"/>
+                <a:ea typeface="微软雅黑"/>
+                <a:cs typeface="Arial"/>
+              </a:rPr>
+              <a:t>▪　</a:t>
+            </a:r>
+            <a:r>
+              <a:rPr sz="1750" b="0">
+                <a:solidFill>
+                  <a:srgbClr val="12324F"/>
+                </a:solidFill>
+                <a:latin typeface="Arial"/>
+                <a:ea typeface="微软雅黑"/>
+                <a:cs typeface="Arial"/>
+              </a:rPr>
+              <a:t>一套完整的肠道微生物源抗菌肽挖掘分析流程，可复用于其他队列与疾病</a:t>
+            </a:r>
+          </a:p>
+          <a:p>
+            <a:pPr algn="l">
+              <a:lnSpc>
+                <a:spcPct val="125000"/>
+              </a:lnSpc>
+              <a:spcBef>
+                <a:spcPts val="1800"/>
+              </a:spcBef>
+              <a:spcAft>
+                <a:spcPts val="0"/>
+              </a:spcAft>
+            </a:pPr>
+            <a:r>
+              <a:rPr sz="1750" b="0">
+                <a:solidFill>
+                  <a:srgbClr val="2F6FB0"/>
+                </a:solidFill>
+                <a:latin typeface="Arial"/>
+                <a:ea typeface="微软雅黑"/>
+                <a:cs typeface="Arial"/>
+              </a:rPr>
+              <a:t>▪　</a:t>
+            </a:r>
+            <a:r>
+              <a:rPr sz="1750" b="0">
+                <a:solidFill>
+                  <a:srgbClr val="12324F"/>
+                </a:solidFill>
+                <a:latin typeface="Arial"/>
+                <a:ea typeface="微软雅黑"/>
+                <a:cs typeface="Arial"/>
+              </a:rPr>
+              <a:t>健康人群与 AD 各阶段特有的候选抗菌肽清单，作为后续研究的线索集</a:t>
+            </a:r>
+          </a:p>
+          <a:p>
+            <a:pPr algn="l">
+              <a:lnSpc>
+                <a:spcPct val="125000"/>
+              </a:lnSpc>
+              <a:spcBef>
+                <a:spcPts val="1800"/>
+              </a:spcBef>
+              <a:spcAft>
+                <a:spcPts val="0"/>
+              </a:spcAft>
+            </a:pPr>
+            <a:r>
+              <a:rPr sz="1750" b="0">
+                <a:solidFill>
+                  <a:srgbClr val="2F6FB0"/>
+                </a:solidFill>
+                <a:latin typeface="Arial"/>
+                <a:ea typeface="微软雅黑"/>
+                <a:cs typeface="Arial"/>
+              </a:rPr>
+              <a:t>▪　</a:t>
+            </a:r>
+            <a:r>
+              <a:rPr sz="1750" b="0">
+                <a:solidFill>
+                  <a:srgbClr val="12324F"/>
+                </a:solidFill>
+                <a:latin typeface="Arial"/>
+                <a:ea typeface="微软雅黑"/>
+                <a:cs typeface="Arial"/>
+              </a:rPr>
+              <a:t>候选抗菌肽与 AD 发病机制关联的分析结果（Aβ 聚集、AChE 结合、炎症通路）</a:t>
+            </a:r>
+          </a:p>
+          <a:p>
+            <a:pPr algn="l">
+              <a:lnSpc>
+                <a:spcPct val="125000"/>
+              </a:lnSpc>
+              <a:spcBef>
+                <a:spcPts val="1800"/>
+              </a:spcBef>
+              <a:spcAft>
+                <a:spcPts val="0"/>
+              </a:spcAft>
+            </a:pPr>
+            <a:r>
+              <a:rPr sz="1750" b="0">
+                <a:solidFill>
+                  <a:srgbClr val="2F6FB0"/>
+                </a:solidFill>
+                <a:latin typeface="Arial"/>
+                <a:ea typeface="微软雅黑"/>
+                <a:cs typeface="Arial"/>
+              </a:rPr>
+              <a:t>▪　</a:t>
+            </a:r>
+            <a:r>
+              <a:rPr sz="1750" b="0">
+                <a:solidFill>
+                  <a:srgbClr val="12324F"/>
+                </a:solidFill>
+                <a:latin typeface="Arial"/>
+                <a:ea typeface="微软雅黑"/>
+                <a:cs typeface="Arial"/>
+              </a:rPr>
+              <a:t>候选抗菌肽抑菌活性的初步实验证据</a:t>
+            </a:r>
+          </a:p>
+          <a:p>
+            <a:pPr algn="l">
+              <a:lnSpc>
+                <a:spcPct val="125000"/>
+              </a:lnSpc>
+              <a:spcBef>
+                <a:spcPts val="1800"/>
+              </a:spcBef>
+              <a:spcAft>
+                <a:spcPts val="0"/>
+              </a:spcAft>
+            </a:pPr>
+            <a:r>
+              <a:rPr sz="1750" b="0">
+                <a:solidFill>
+                  <a:srgbClr val="2F6FB0"/>
+                </a:solidFill>
+                <a:latin typeface="Arial"/>
+                <a:ea typeface="微软雅黑"/>
+                <a:cs typeface="Arial"/>
+              </a:rPr>
+              <a:t>▪　</a:t>
+            </a:r>
+            <a:r>
+              <a:rPr sz="1750" b="0">
+                <a:solidFill>
+                  <a:srgbClr val="12324F"/>
+                </a:solidFill>
+                <a:latin typeface="Arial"/>
+                <a:ea typeface="微软雅黑"/>
+                <a:cs typeface="Arial"/>
+              </a:rPr>
+              <a:t>以第一作者撰写并投稿 SCI 收录论文 1 篇，完成学位论文</a:t>
+            </a:r>
+          </a:p>
+        </p:txBody>
+      </p:sp>
+      <p:sp>
+        <p:nvSpPr>
+          <p:cNvPr id="5" name="Rounded Rectangle 4"/>
           <p:cNvSpPr/>
           <p:nvPr/>
         </p:nvSpPr>
         <p:spPr>
           <a:xfrm>
-            <a:off x="566928" y="1527048"/>
-            <a:ext cx="11057839" cy="1170432"/>
+            <a:off x="566928" y="5760720"/>
+            <a:ext cx="11057839" cy="548640"/>
           </a:xfrm>
           <a:prstGeom prst="roundRect">
             <a:avLst>
@@ -5263,11 +5845,11 @@
             </a:avLst>
           </a:prstGeom>
           <a:solidFill>
-            <a:srgbClr val="FDF2E3"/>
+            <a:srgbClr val="ECF7F4"/>
           </a:solidFill>
           <a:ln w="15875">
             <a:solidFill>
-              <a:srgbClr val="E08A2E"/>
+              <a:srgbClr val="2F9E8F"/>
             </a:solidFill>
           </a:ln>
           <a:effectLst/>
@@ -5287,18 +5869,18 @@
           </a:fontRef>
         </p:style>
         <p:txBody>
-          <a:bodyPr rtlCol="0" anchor="ctr" wrap="square" lIns="182880" rIns="182880"/>
-          <a:lstStyle/>
-          <a:p>
-            <a:pPr algn="l">
-              <a:lnSpc>
-                <a:spcPct val="112000"/>
-              </a:lnSpc>
-              <a:spcBef>
-                <a:spcPts val="0"/>
-              </a:spcBef>
-              <a:spcAft>
-                <a:spcPts val="400"/>
+          <a:bodyPr rtlCol="0" anchor="ctr" wrap="square" lIns="164592" rIns="164592"/>
+          <a:lstStyle/>
+          <a:p>
+            <a:pPr algn="l">
+              <a:lnSpc>
+                <a:spcPct val="105000"/>
+              </a:lnSpc>
+              <a:spcBef>
+                <a:spcPts val="0"/>
+              </a:spcBef>
+              <a:spcAft>
+                <a:spcPts val="0"/>
               </a:spcAft>
             </a:pPr>
             <a:r>
@@ -5310,293 +5892,14 @@
                 <a:ea typeface="微软雅黑"/>
                 <a:cs typeface="Arial"/>
               </a:rPr>
-              <a:t>问题 1　去冗余后 17 例受试者无代表基因组入选（覆盖 459/476 例）</a:t>
-            </a:r>
-          </a:p>
-          <a:p>
-            <a:pPr algn="l">
-              <a:lnSpc>
-                <a:spcPct val="112000"/>
-              </a:lnSpc>
-              <a:spcBef>
-                <a:spcPts val="0"/>
-              </a:spcBef>
-              <a:spcAft>
-                <a:spcPts val="0"/>
-              </a:spcAft>
-            </a:pPr>
-            <a:r>
-              <a:rPr sz="1650" b="0">
-                <a:solidFill>
-                  <a:srgbClr val="12324F"/>
-                </a:solidFill>
-                <a:latin typeface="Arial"/>
-                <a:ea typeface="微软雅黑"/>
-                <a:cs typeface="Arial"/>
-              </a:rPr>
-              <a:t>应对：丰度层面改用全量 22 582 个 MAGs 回贴，恢复样本覆盖，避免参考集筛选造成样本缺失。</a:t>
-            </a:r>
-          </a:p>
-        </p:txBody>
-      </p:sp>
-      <p:sp>
-        <p:nvSpPr>
-          <p:cNvPr id="5" name="Rounded Rectangle 4"/>
-          <p:cNvSpPr/>
-          <p:nvPr/>
-        </p:nvSpPr>
-        <p:spPr>
-          <a:xfrm>
-            <a:off x="566928" y="2825496"/>
-            <a:ext cx="11057839" cy="1170432"/>
-          </a:xfrm>
-          <a:prstGeom prst="roundRect">
-            <a:avLst>
-              <a:gd name="adj" fmla="val 8000"/>
-            </a:avLst>
-          </a:prstGeom>
-          <a:solidFill>
-            <a:srgbClr val="FDF2E3"/>
-          </a:solidFill>
-          <a:ln w="15875">
-            <a:solidFill>
-              <a:srgbClr val="E08A2E"/>
-            </a:solidFill>
-          </a:ln>
-          <a:effectLst/>
-        </p:spPr>
-        <p:style>
-          <a:lnRef idx="1">
-            <a:schemeClr val="accent1"/>
-          </a:lnRef>
-          <a:fillRef idx="3">
-            <a:schemeClr val="accent1"/>
-          </a:fillRef>
-          <a:effectRef idx="2">
-            <a:schemeClr val="accent1"/>
-          </a:effectRef>
-          <a:fontRef idx="minor">
-            <a:schemeClr val="lt1"/>
-          </a:fontRef>
-        </p:style>
-        <p:txBody>
-          <a:bodyPr rtlCol="0" anchor="ctr" wrap="square" lIns="182880" rIns="182880"/>
-          <a:lstStyle/>
-          <a:p>
-            <a:pPr algn="l">
-              <a:lnSpc>
-                <a:spcPct val="112000"/>
-              </a:lnSpc>
-              <a:spcBef>
-                <a:spcPts val="0"/>
-              </a:spcBef>
-              <a:spcAft>
-                <a:spcPts val="400"/>
-              </a:spcAft>
-            </a:pPr>
-            <a:r>
-              <a:rPr sz="1700" b="1">
-                <a:solidFill>
-                  <a:srgbClr val="12324F"/>
-                </a:solidFill>
-                <a:latin typeface="Arial"/>
-                <a:ea typeface="微软雅黑"/>
-                <a:cs typeface="Arial"/>
-              </a:rPr>
-              <a:t>问题 2　候选抗菌肽存在假阳性风险</a:t>
-            </a:r>
-          </a:p>
-          <a:p>
-            <a:pPr algn="l">
-              <a:lnSpc>
-                <a:spcPct val="112000"/>
-              </a:lnSpc>
-              <a:spcBef>
-                <a:spcPts val="0"/>
-              </a:spcBef>
-              <a:spcAft>
-                <a:spcPts val="0"/>
-              </a:spcAft>
-            </a:pPr>
-            <a:r>
-              <a:rPr sz="1650" b="0">
-                <a:solidFill>
-                  <a:srgbClr val="12324F"/>
-                </a:solidFill>
-                <a:latin typeface="Arial"/>
-                <a:ea typeface="微软雅黑"/>
-                <a:cs typeface="Arial"/>
-              </a:rPr>
-              <a:t>应对：同源过滤 + 理化性质一致性评估 + 外部独立测试集三重策略控制，并尽可能辅以体外抑菌实验验证。</a:t>
-            </a:r>
-          </a:p>
-        </p:txBody>
-      </p:sp>
-      <p:sp>
-        <p:nvSpPr>
-          <p:cNvPr id="6" name="Rounded Rectangle 5"/>
-          <p:cNvSpPr/>
-          <p:nvPr/>
-        </p:nvSpPr>
-        <p:spPr>
-          <a:xfrm>
-            <a:off x="566928" y="4123944"/>
-            <a:ext cx="11057839" cy="1170432"/>
-          </a:xfrm>
-          <a:prstGeom prst="roundRect">
-            <a:avLst>
-              <a:gd name="adj" fmla="val 8000"/>
-            </a:avLst>
-          </a:prstGeom>
-          <a:solidFill>
-            <a:srgbClr val="FDF2E3"/>
-          </a:solidFill>
-          <a:ln w="15875">
-            <a:solidFill>
-              <a:srgbClr val="E08A2E"/>
-            </a:solidFill>
-          </a:ln>
-          <a:effectLst/>
-        </p:spPr>
-        <p:style>
-          <a:lnRef idx="1">
-            <a:schemeClr val="accent1"/>
-          </a:lnRef>
-          <a:fillRef idx="3">
-            <a:schemeClr val="accent1"/>
-          </a:fillRef>
-          <a:effectRef idx="2">
-            <a:schemeClr val="accent1"/>
-          </a:effectRef>
-          <a:fontRef idx="minor">
-            <a:schemeClr val="lt1"/>
-          </a:fontRef>
-        </p:style>
-        <p:txBody>
-          <a:bodyPr rtlCol="0" anchor="ctr" wrap="square" lIns="182880" rIns="182880"/>
-          <a:lstStyle/>
-          <a:p>
-            <a:pPr algn="l">
-              <a:lnSpc>
-                <a:spcPct val="112000"/>
-              </a:lnSpc>
-              <a:spcBef>
-                <a:spcPts val="0"/>
-              </a:spcBef>
-              <a:spcAft>
-                <a:spcPts val="400"/>
-              </a:spcAft>
-            </a:pPr>
-            <a:r>
-              <a:rPr sz="1700" b="1">
-                <a:solidFill>
-                  <a:srgbClr val="12324F"/>
-                </a:solidFill>
-                <a:latin typeface="Arial"/>
-                <a:ea typeface="微软雅黑"/>
-                <a:cs typeface="Arial"/>
-              </a:rPr>
-              <a:t>问题 3　深度学习模型在宏基因组长尾序列上的泛化能力</a:t>
-            </a:r>
-          </a:p>
-          <a:p>
-            <a:pPr algn="l">
-              <a:lnSpc>
-                <a:spcPct val="112000"/>
-              </a:lnSpc>
-              <a:spcBef>
-                <a:spcPts val="0"/>
-              </a:spcBef>
-              <a:spcAft>
-                <a:spcPts val="0"/>
-              </a:spcAft>
-            </a:pPr>
-            <a:r>
-              <a:rPr sz="1650" b="0">
-                <a:solidFill>
-                  <a:srgbClr val="12324F"/>
-                </a:solidFill>
-                <a:latin typeface="Arial"/>
-                <a:ea typeface="微软雅黑"/>
-                <a:cs typeface="Arial"/>
-              </a:rPr>
-              <a:t>应对：多次随机种子重复训练与独立数据集验证，报告性能的不确定性区间；必要时以集成策略提升稳健性。</a:t>
-            </a:r>
-          </a:p>
-        </p:txBody>
-      </p:sp>
-      <p:sp>
-        <p:nvSpPr>
-          <p:cNvPr id="7" name="Rounded Rectangle 6"/>
-          <p:cNvSpPr/>
-          <p:nvPr/>
-        </p:nvSpPr>
-        <p:spPr>
-          <a:xfrm>
-            <a:off x="566928" y="5760720"/>
-            <a:ext cx="11057839" cy="548640"/>
-          </a:xfrm>
-          <a:prstGeom prst="roundRect">
-            <a:avLst>
-              <a:gd name="adj" fmla="val 8000"/>
-            </a:avLst>
-          </a:prstGeom>
-          <a:solidFill>
-            <a:srgbClr val="ECF7F4"/>
-          </a:solidFill>
-          <a:ln w="15875">
-            <a:solidFill>
-              <a:srgbClr val="2F9E8F"/>
-            </a:solidFill>
-          </a:ln>
-          <a:effectLst/>
-        </p:spPr>
-        <p:style>
-          <a:lnRef idx="1">
-            <a:schemeClr val="accent1"/>
-          </a:lnRef>
-          <a:fillRef idx="3">
-            <a:schemeClr val="accent1"/>
-          </a:fillRef>
-          <a:effectRef idx="2">
-            <a:schemeClr val="accent1"/>
-          </a:effectRef>
-          <a:fontRef idx="minor">
-            <a:schemeClr val="lt1"/>
-          </a:fontRef>
-        </p:style>
-        <p:txBody>
-          <a:bodyPr rtlCol="0" anchor="ctr" wrap="square" lIns="164592" rIns="164592"/>
-          <a:lstStyle/>
-          <a:p>
-            <a:pPr algn="l">
-              <a:lnSpc>
-                <a:spcPct val="105000"/>
-              </a:lnSpc>
-              <a:spcBef>
-                <a:spcPts val="0"/>
-              </a:spcBef>
-              <a:spcAft>
-                <a:spcPts val="0"/>
-              </a:spcAft>
-            </a:pPr>
-            <a:r>
-              <a:rPr sz="1700" b="1">
-                <a:solidFill>
-                  <a:srgbClr val="12324F"/>
-                </a:solidFill>
-                <a:latin typeface="Arial"/>
-                <a:ea typeface="微软雅黑"/>
-                <a:cs typeface="Arial"/>
-              </a:rPr>
-              <a:t>问题均有明确的技术对策，可通过在研工作按期解决</a:t>
-            </a:r>
-          </a:p>
-        </p:txBody>
-      </p:sp>
-      <p:sp>
-        <p:nvSpPr>
-          <p:cNvPr id="8" name="TextBox 7"/>
+              <a:t>成果既包括数据与清单，也包括机制线索与实验证据</a:t>
+            </a:r>
+          </a:p>
+        </p:txBody>
+      </p:sp>
+      <p:sp>
+        <p:nvSpPr>
+          <p:cNvPr id="6" name="TextBox 5"/>
           <p:cNvSpPr txBox="1"/>
           <p:nvPr/>
         </p:nvSpPr>
@@ -5643,7 +5946,7 @@
       </p:sp>
       <p:sp>
         <p:nvSpPr>
-          <p:cNvPr id="9" name="TextBox 8"/>
+          <p:cNvPr id="7" name="TextBox 6"/>
           <p:cNvSpPr txBox="1"/>
           <p:nvPr/>
         </p:nvSpPr>
@@ -5942,7 +6245,7 @@
                 <a:ea typeface="微软雅黑"/>
                 <a:cs typeface="Arial"/>
               </a:rPr>
-              <a:t>研究背景与科学问题：AD—肠—脑轴—抗菌肽</a:t>
+              <a:t>研究思路：从肠道微生物组到抗菌肽</a:t>
             </a:r>
           </a:p>
           <a:p>
@@ -5977,7 +6280,7 @@
                 <a:ea typeface="微软雅黑"/>
                 <a:cs typeface="Arial"/>
               </a:rPr>
-              <a:t>研究目标与技术路线</a:t>
+              <a:t>已完成工作：数据资源、多肽库与三模型共识预测</a:t>
             </a:r>
           </a:p>
           <a:p>
@@ -6012,7 +6315,7 @@
                 <a:ea typeface="微软雅黑"/>
                 <a:cs typeface="Arial"/>
               </a:rPr>
-              <a:t>已完成工作：476 例宏基因组 → 9 139.2 万条非冗余多肽</a:t>
+              <a:t>已完成工作：分阶段差异分析与宏蛋白组去重</a:t>
             </a:r>
           </a:p>
           <a:p>
@@ -6047,7 +6350,7 @@
                 <a:ea typeface="微软雅黑"/>
                 <a:cs typeface="Arial"/>
               </a:rPr>
-              <a:t>阶段性结果：四个队列的 sORF 数量层面比较</a:t>
+              <a:t>下一步：与 AD 发病机制的关联分析</a:t>
             </a:r>
           </a:p>
           <a:p>
@@ -6082,7 +6385,7 @@
                 <a:ea typeface="微软雅黑"/>
                 <a:cs typeface="Arial"/>
               </a:rPr>
-              <a:t>下一步计划：DeepMetaAMP 模型与候选抗菌肽差异分析</a:t>
+              <a:t>下一步：极简抑菌实验验证</a:t>
             </a:r>
           </a:p>
           <a:p>
@@ -6117,7 +6420,7 @@
                 <a:ea typeface="微软雅黑"/>
                 <a:cs typeface="Arial"/>
               </a:rPr>
-              <a:t>研究进度、存在问题与应对措施</a:t>
+              <a:t>工作进度与后续安排</a:t>
             </a:r>
           </a:p>
         </p:txBody>
@@ -6186,7 +6489,7 @@
                 <a:ea typeface="微软雅黑"/>
                 <a:cs typeface="Arial"/>
               </a:rPr>
-              <a:t>汇报重点：已完成的数据资源与阶段性结果，以及下一步的技术方案</a:t>
+              <a:t>本次汇报按导师要求，重点讲清研究思路与各项工作的完成程度</a:t>
             </a:r>
           </a:p>
         </p:txBody>
@@ -6345,7 +6648,7 @@
                 <a:ea typeface="微软雅黑"/>
                 <a:cs typeface="Arial"/>
               </a:rPr>
-              <a:t>AD 与肠道微生物组通过“肠—脑轴”双向关联</a:t>
+              <a:t>研究思路：八步走，前三步与预测已完成</a:t>
             </a:r>
           </a:p>
         </p:txBody>
@@ -6392,139 +6695,35 @@
                 <a:ea typeface="微软雅黑"/>
                 <a:cs typeface="Arial"/>
               </a:rPr>
-              <a:t>研究背景与科学问题</a:t>
-            </a:r>
-          </a:p>
-        </p:txBody>
-      </p:sp>
-      <p:sp>
-        <p:nvSpPr>
-          <p:cNvPr id="4" name="TextBox 3"/>
-          <p:cNvSpPr txBox="1"/>
-          <p:nvPr/>
-        </p:nvSpPr>
+              <a:t>研究思路</a:t>
+            </a:r>
+          </a:p>
+        </p:txBody>
+      </p:sp>
+      <p:pic>
+        <p:nvPicPr>
+          <p:cNvPr id="4" name="Picture 3" descr="figA_研究思路总览.png"/>
+          <p:cNvPicPr>
+            <a:picLocks noChangeAspect="1"/>
+          </p:cNvPicPr>
+          <p:nvPr/>
+        </p:nvPicPr>
+        <p:blipFill>
+          <a:blip r:embed="rId2"/>
+          <a:stretch>
+            <a:fillRect/>
+          </a:stretch>
+        </p:blipFill>
         <p:spPr>
           <a:xfrm>
             <a:off x="566928" y="1481328"/>
-            <a:ext cx="11057839" cy="3017520"/>
+            <a:ext cx="11057839" cy="4149599"/>
           </a:xfrm>
           <a:prstGeom prst="rect">
             <a:avLst/>
           </a:prstGeom>
-          <a:noFill/>
-        </p:spPr>
-        <p:txBody>
-          <a:bodyPr wrap="square" anchor="t" lIns="36576" rIns="36576" tIns="0" bIns="0">
-            <a:spAutoFit/>
-          </a:bodyPr>
-          <a:lstStyle/>
-          <a:p>
-            <a:pPr algn="l">
-              <a:lnSpc>
-                <a:spcPct val="125000"/>
-              </a:lnSpc>
-              <a:spcBef>
-                <a:spcPts val="0"/>
-              </a:spcBef>
-              <a:spcAft>
-                <a:spcPts val="0"/>
-              </a:spcAft>
-            </a:pPr>
-            <a:r>
-              <a:rPr sz="1700" b="1">
-                <a:solidFill>
-                  <a:srgbClr val="2F6FB0"/>
-                </a:solidFill>
-                <a:latin typeface="Arial"/>
-                <a:ea typeface="微软雅黑"/>
-                <a:cs typeface="Arial"/>
-              </a:rPr>
-              <a:t>现状 1　</a:t>
-            </a:r>
-            <a:r>
-              <a:rPr sz="1700" b="0">
-                <a:solidFill>
-                  <a:srgbClr val="12324F"/>
-                </a:solidFill>
-                <a:latin typeface="Arial"/>
-                <a:ea typeface="微软雅黑"/>
-                <a:cs typeface="Arial"/>
-              </a:rPr>
-              <a:t>AD 患者肠道微生物组存在菌群失调：短链脂肪酸产生菌减少、炎症相关菌增多，伴随肠屏障功能下降与系统性炎症升高。</a:t>
-            </a:r>
-          </a:p>
-          <a:p>
-            <a:pPr algn="l">
-              <a:lnSpc>
-                <a:spcPct val="125000"/>
-              </a:lnSpc>
-              <a:spcBef>
-                <a:spcPts val="1500"/>
-              </a:spcBef>
-              <a:spcAft>
-                <a:spcPts val="0"/>
-              </a:spcAft>
-            </a:pPr>
-            <a:r>
-              <a:rPr sz="1700" b="1">
-                <a:solidFill>
-                  <a:srgbClr val="2F6FB0"/>
-                </a:solidFill>
-                <a:latin typeface="Arial"/>
-                <a:ea typeface="微软雅黑"/>
-                <a:cs typeface="Arial"/>
-              </a:rPr>
-              <a:t>现状 2　</a:t>
-            </a:r>
-            <a:r>
-              <a:rPr sz="1700" b="0">
-                <a:solidFill>
-                  <a:srgbClr val="12324F"/>
-                </a:solidFill>
-                <a:latin typeface="Arial"/>
-                <a:ea typeface="微软雅黑"/>
-                <a:cs typeface="Arial"/>
-              </a:rPr>
-              <a:t>抗菌肽（AMPs）兼具直接抗菌与免疫调节功能，是连接微生物刺激与神经炎症的潜在效应分子；微生物基因组中的小开放阅读框（sORF）可编码此类短肽。</a:t>
-            </a:r>
-          </a:p>
-          <a:p>
-            <a:pPr algn="l">
-              <a:lnSpc>
-                <a:spcPct val="125000"/>
-              </a:lnSpc>
-              <a:spcBef>
-                <a:spcPts val="1500"/>
-              </a:spcBef>
-              <a:spcAft>
-                <a:spcPts val="0"/>
-              </a:spcAft>
-            </a:pPr>
-            <a:r>
-              <a:rPr sz="1700" b="1">
-                <a:solidFill>
-                  <a:srgbClr val="2F6FB0"/>
-                </a:solidFill>
-                <a:latin typeface="Arial"/>
-                <a:ea typeface="微软雅黑"/>
-                <a:cs typeface="Arial"/>
-              </a:rPr>
-              <a:t>现状 3　</a:t>
-            </a:r>
-            <a:r>
-              <a:rPr sz="1700" b="0">
-                <a:solidFill>
-                  <a:srgbClr val="12324F"/>
-                </a:solidFill>
-                <a:latin typeface="Arial"/>
-                <a:ea typeface="微软雅黑"/>
-                <a:cs typeface="Arial"/>
-              </a:rPr>
-              <a:t>现有 AMPs 研究多依赖宿主来源数据库与通用预测模型，缺乏面向 AD 患者、覆盖病程各阶段、且基于微生物组序列空间的疾病特异性系统分析。</a:t>
-            </a:r>
-          </a:p>
-        </p:txBody>
-      </p:sp>
+        </p:spPr>
+      </p:pic>
       <p:sp>
         <p:nvSpPr>
           <p:cNvPr id="5" name="Rounded Rectangle 4"/>
@@ -6533,8 +6732,8 @@
         </p:nvSpPr>
         <p:spPr>
           <a:xfrm>
-            <a:off x="566928" y="4572000"/>
-            <a:ext cx="11057839" cy="1060704"/>
+            <a:off x="566928" y="5760720"/>
+            <a:ext cx="11057839" cy="548640"/>
           </a:xfrm>
           <a:prstGeom prst="roundRect">
             <a:avLst>
@@ -6542,11 +6741,11 @@
             </a:avLst>
           </a:prstGeom>
           <a:solidFill>
-            <a:srgbClr val="FDF2E3"/>
+            <a:srgbClr val="ECF7F4"/>
           </a:solidFill>
           <a:ln w="15875">
             <a:solidFill>
-              <a:srgbClr val="E08A2E"/>
+              <a:srgbClr val="2F9E8F"/>
             </a:solidFill>
           </a:ln>
           <a:effectLst/>
@@ -6566,54 +6765,30 @@
           </a:fontRef>
         </p:style>
         <p:txBody>
-          <a:bodyPr rtlCol="0" anchor="ctr" wrap="square" lIns="182880" rIns="182880"/>
-          <a:lstStyle/>
-          <a:p>
-            <a:pPr algn="l">
-              <a:lnSpc>
-                <a:spcPct val="118000"/>
-              </a:lnSpc>
-              <a:spcBef>
-                <a:spcPts val="0"/>
-              </a:spcBef>
-              <a:spcAft>
-                <a:spcPts val="400"/>
+          <a:bodyPr rtlCol="0" anchor="ctr" wrap="square" lIns="164592" rIns="164592"/>
+          <a:lstStyle/>
+          <a:p>
+            <a:pPr algn="l">
+              <a:lnSpc>
+                <a:spcPct val="105000"/>
+              </a:lnSpc>
+              <a:spcBef>
+                <a:spcPts val="0"/>
+              </a:spcBef>
+              <a:spcAft>
+                <a:spcPts val="0"/>
               </a:spcAft>
             </a:pPr>
             <a:r>
               <a:rPr sz="1700" b="1">
                 <a:solidFill>
-                  <a:srgbClr val="E08A2E"/>
-                </a:solidFill>
-                <a:latin typeface="Arial"/>
-                <a:ea typeface="微软雅黑"/>
-                <a:cs typeface="Arial"/>
-              </a:rPr>
-              <a:t>科学问题</a:t>
-            </a:r>
-          </a:p>
-          <a:p>
-            <a:pPr algn="l">
-              <a:lnSpc>
-                <a:spcPct val="115000"/>
-              </a:lnSpc>
-              <a:spcBef>
-                <a:spcPts val="0"/>
-              </a:spcBef>
-              <a:spcAft>
-                <a:spcPts val="0"/>
-              </a:spcAft>
-            </a:pPr>
-            <a:r>
-              <a:rPr sz="1800" b="1">
-                <a:solidFill>
                   <a:srgbClr val="12324F"/>
                 </a:solidFill>
                 <a:latin typeface="Arial"/>
                 <a:ea typeface="微软雅黑"/>
                 <a:cs typeface="Arial"/>
               </a:rPr>
-              <a:t>AD 患者与健康人群肠道微生物组所编码的候选抗菌肽是否存在差异？若存在，是否随认知功能下降的病程阶段呈现连续演变？</a:t>
+              <a:t>思路主线：数据资源 → 短肽库 → 三模型预测 → 分阶段差异 → 去重定特有种 → 机制关联与验证</a:t>
             </a:r>
           </a:p>
         </p:txBody>
@@ -6772,7 +6947,7 @@
                 <a:ea typeface="微软雅黑"/>
                 <a:cs typeface="Arial"/>
               </a:rPr>
-              <a:t>研究目标：构建无偏多肽库并识别 AD 相关候选抗菌肽</a:t>
+              <a:t>科学问题：AD 患者与健康人群的抗菌肽是否存在差异</a:t>
             </a:r>
           </a:p>
         </p:txBody>
@@ -6819,35 +6994,139 @@
                 <a:ea typeface="微软雅黑"/>
                 <a:cs typeface="Arial"/>
               </a:rPr>
-              <a:t>研究目标与技术路线</a:t>
-            </a:r>
-          </a:p>
-        </p:txBody>
-      </p:sp>
-      <p:pic>
-        <p:nvPicPr>
-          <p:cNvPr id="4" name="Picture 3" descr="fig1_技术路线.png"/>
-          <p:cNvPicPr>
-            <a:picLocks noChangeAspect="1"/>
-          </p:cNvPicPr>
-          <p:nvPr/>
-        </p:nvPicPr>
-        <p:blipFill>
-          <a:blip r:embed="rId2"/>
-          <a:stretch>
-            <a:fillRect/>
-          </a:stretch>
-        </p:blipFill>
+              <a:t>研究背景与科学问题</a:t>
+            </a:r>
+          </a:p>
+        </p:txBody>
+      </p:sp>
+      <p:sp>
+        <p:nvSpPr>
+          <p:cNvPr id="4" name="TextBox 3"/>
+          <p:cNvSpPr txBox="1"/>
+          <p:nvPr/>
+        </p:nvSpPr>
         <p:spPr>
           <a:xfrm>
             <a:off x="566928" y="1481328"/>
-            <a:ext cx="11057839" cy="3722991"/>
+            <a:ext cx="11057839" cy="2926080"/>
           </a:xfrm>
           <a:prstGeom prst="rect">
             <a:avLst/>
           </a:prstGeom>
-        </p:spPr>
-      </p:pic>
+          <a:noFill/>
+        </p:spPr>
+        <p:txBody>
+          <a:bodyPr wrap="square" anchor="t" lIns="36576" rIns="36576" tIns="0" bIns="0">
+            <a:spAutoFit/>
+          </a:bodyPr>
+          <a:lstStyle/>
+          <a:p>
+            <a:pPr algn="l">
+              <a:lnSpc>
+                <a:spcPct val="125000"/>
+              </a:lnSpc>
+              <a:spcBef>
+                <a:spcPts val="0"/>
+              </a:spcBef>
+              <a:spcAft>
+                <a:spcPts val="0"/>
+              </a:spcAft>
+            </a:pPr>
+            <a:r>
+              <a:rPr sz="1700" b="1">
+                <a:solidFill>
+                  <a:srgbClr val="2F6FB0"/>
+                </a:solidFill>
+                <a:latin typeface="Arial"/>
+                <a:ea typeface="微软雅黑"/>
+                <a:cs typeface="Arial"/>
+              </a:rPr>
+              <a:t>背景　</a:t>
+            </a:r>
+            <a:r>
+              <a:rPr sz="1700" b="0">
+                <a:solidFill>
+                  <a:srgbClr val="12324F"/>
+                </a:solidFill>
+                <a:latin typeface="Arial"/>
+                <a:ea typeface="微软雅黑"/>
+                <a:cs typeface="Arial"/>
+              </a:rPr>
+              <a:t>AD 的发生发展被认为与肠—脑轴介导的慢性神经炎症密切相关，肠道微生物组的组成与功能在 AD 患者与健康人群之间存在差异。</a:t>
+            </a:r>
+          </a:p>
+          <a:p>
+            <a:pPr algn="l">
+              <a:lnSpc>
+                <a:spcPct val="125000"/>
+              </a:lnSpc>
+              <a:spcBef>
+                <a:spcPts val="1600"/>
+              </a:spcBef>
+              <a:spcAft>
+                <a:spcPts val="0"/>
+              </a:spcAft>
+            </a:pPr>
+            <a:r>
+              <a:rPr sz="1700" b="1">
+                <a:solidFill>
+                  <a:srgbClr val="2F6FB0"/>
+                </a:solidFill>
+                <a:latin typeface="Arial"/>
+                <a:ea typeface="微软雅黑"/>
+                <a:cs typeface="Arial"/>
+              </a:rPr>
+              <a:t>切入点　</a:t>
+            </a:r>
+            <a:r>
+              <a:rPr sz="1700" b="0">
+                <a:solidFill>
+                  <a:srgbClr val="12324F"/>
+                </a:solidFill>
+                <a:latin typeface="Arial"/>
+                <a:ea typeface="微软雅黑"/>
+                <a:cs typeface="Arial"/>
+              </a:rPr>
+              <a:t>肠道微生物基因组中的小开放阅读框可编码短肽，其中包含具有抗菌与免疫调节功能的抗菌肽，可能是连接微生物刺激与神经炎症的潜在效应分子。</a:t>
+            </a:r>
+          </a:p>
+          <a:p>
+            <a:pPr algn="l">
+              <a:lnSpc>
+                <a:spcPct val="125000"/>
+              </a:lnSpc>
+              <a:spcBef>
+                <a:spcPts val="1600"/>
+              </a:spcBef>
+              <a:spcAft>
+                <a:spcPts val="0"/>
+              </a:spcAft>
+            </a:pPr>
+            <a:r>
+              <a:rPr sz="1700" b="1">
+                <a:solidFill>
+                  <a:srgbClr val="2F6FB0"/>
+                </a:solidFill>
+                <a:latin typeface="Arial"/>
+                <a:ea typeface="微软雅黑"/>
+                <a:cs typeface="Arial"/>
+              </a:rPr>
+              <a:t>空白　</a:t>
+            </a:r>
+            <a:r>
+              <a:rPr sz="1700" b="0">
+                <a:solidFill>
+                  <a:srgbClr val="12324F"/>
+                </a:solidFill>
+                <a:latin typeface="Arial"/>
+                <a:ea typeface="微软雅黑"/>
+                <a:cs typeface="Arial"/>
+              </a:rPr>
+              <a:t>已有抗菌肽研究多基于通用训练集与宿主来源数据，缺乏面向 AD 人群、并按认知阶段分层比较微生物源抗菌肽的工作。</a:t>
+            </a:r>
+          </a:p>
+        </p:txBody>
+      </p:sp>
       <p:sp>
         <p:nvSpPr>
           <p:cNvPr id="5" name="Rounded Rectangle 4"/>
@@ -6856,8 +7135,8 @@
         </p:nvSpPr>
         <p:spPr>
           <a:xfrm>
-            <a:off x="566928" y="5760720"/>
-            <a:ext cx="11057839" cy="548640"/>
+            <a:off x="566928" y="4572000"/>
+            <a:ext cx="11057839" cy="1060704"/>
           </a:xfrm>
           <a:prstGeom prst="roundRect">
             <a:avLst>
@@ -6865,11 +7144,11 @@
             </a:avLst>
           </a:prstGeom>
           <a:solidFill>
-            <a:srgbClr val="ECF7F4"/>
+            <a:srgbClr val="FDF2E3"/>
           </a:solidFill>
           <a:ln w="15875">
             <a:solidFill>
-              <a:srgbClr val="2F9E8F"/>
+              <a:srgbClr val="E08A2E"/>
             </a:solidFill>
           </a:ln>
           <a:effectLst/>
@@ -6889,30 +7168,54 @@
           </a:fontRef>
         </p:style>
         <p:txBody>
-          <a:bodyPr rtlCol="0" anchor="ctr" wrap="square" lIns="164592" rIns="164592"/>
-          <a:lstStyle/>
-          <a:p>
-            <a:pPr algn="l">
-              <a:lnSpc>
-                <a:spcPct val="105000"/>
-              </a:lnSpc>
-              <a:spcBef>
-                <a:spcPts val="0"/>
-              </a:spcBef>
-              <a:spcAft>
-                <a:spcPts val="0"/>
+          <a:bodyPr rtlCol="0" anchor="ctr" wrap="square" lIns="182880" rIns="182880"/>
+          <a:lstStyle/>
+          <a:p>
+            <a:pPr algn="l">
+              <a:lnSpc>
+                <a:spcPct val="118000"/>
+              </a:lnSpc>
+              <a:spcBef>
+                <a:spcPts val="0"/>
+              </a:spcBef>
+              <a:spcAft>
+                <a:spcPts val="400"/>
               </a:spcAft>
             </a:pPr>
             <a:r>
               <a:rPr sz="1700" b="1">
                 <a:solidFill>
+                  <a:srgbClr val="E08A2E"/>
+                </a:solidFill>
+                <a:latin typeface="Arial"/>
+                <a:ea typeface="微软雅黑"/>
+                <a:cs typeface="Arial"/>
+              </a:rPr>
+              <a:t>科学问题</a:t>
+            </a:r>
+          </a:p>
+          <a:p>
+            <a:pPr algn="l">
+              <a:lnSpc>
+                <a:spcPct val="115000"/>
+              </a:lnSpc>
+              <a:spcBef>
+                <a:spcPts val="0"/>
+              </a:spcBef>
+              <a:spcAft>
+                <a:spcPts val="0"/>
+              </a:spcAft>
+            </a:pPr>
+            <a:r>
+              <a:rPr sz="1800" b="1">
+                <a:solidFill>
                   <a:srgbClr val="12324F"/>
                 </a:solidFill>
                 <a:latin typeface="Arial"/>
                 <a:ea typeface="微软雅黑"/>
                 <a:cs typeface="Arial"/>
               </a:rPr>
-              <a:t>技术路线两端已打通：左侧数据处理与多肽库构建已完成，右侧模型与差异分析正在进行</a:t>
+              <a:t>AD 患者与健康人群肠道微生物组所编码的抗菌肽是否存在差异？能否筛选出各阶段特有的抗菌肽，并与 AD 的发病机制建立联系？</a:t>
             </a:r>
           </a:p>
         </p:txBody>
@@ -7071,7 +7374,7 @@
                 <a:ea typeface="微软雅黑"/>
                 <a:cs typeface="Arial"/>
               </a:rPr>
-              <a:t>已完成 ①：22 582 个 MAGs，1 971 个代表基因组</a:t>
+              <a:t>已完成：数据资源与微生物源短肽库构建</a:t>
             </a:r>
           </a:p>
         </p:txBody>
@@ -7118,7 +7421,7 @@
                 <a:ea typeface="微软雅黑"/>
                 <a:cs typeface="Arial"/>
               </a:rPr>
-              <a:t>已完成工作 · 数据资源</a:t>
+              <a:t>已完成工作 · 第一步</a:t>
             </a:r>
           </a:p>
         </p:txBody>
@@ -7131,8 +7434,8 @@
         </p:nvSpPr>
         <p:spPr>
           <a:xfrm>
-            <a:off x="566928" y="1591056"/>
-            <a:ext cx="6537960" cy="4078224"/>
+            <a:off x="566928" y="1618488"/>
+            <a:ext cx="6446520" cy="4050792"/>
           </a:xfrm>
           <a:prstGeom prst="rect">
             <a:avLst/>
@@ -7147,17 +7450,17 @@
           <a:p>
             <a:pPr algn="l">
               <a:lnSpc>
-                <a:spcPct val="122000"/>
-              </a:lnSpc>
-              <a:spcBef>
-                <a:spcPts val="0"/>
-              </a:spcBef>
-              <a:spcAft>
-                <a:spcPts val="0"/>
-              </a:spcAft>
-            </a:pPr>
-            <a:r>
-              <a:rPr sz="1650" b="0">
+                <a:spcPct val="125000"/>
+              </a:lnSpc>
+              <a:spcBef>
+                <a:spcPts val="0"/>
+              </a:spcBef>
+              <a:spcAft>
+                <a:spcPts val="0"/>
+              </a:spcAft>
+            </a:pPr>
+            <a:r>
+              <a:rPr sz="1700" b="0">
                 <a:solidFill>
                   <a:srgbClr val="2F6FB0"/>
                 </a:solidFill>
@@ -7168,7 +7471,7 @@
               <a:t>▪　</a:t>
             </a:r>
             <a:r>
-              <a:rPr sz="1650" b="0">
+              <a:rPr sz="1700" b="0">
                 <a:solidFill>
                   <a:srgbClr val="12324F"/>
                 </a:solidFill>
@@ -7176,23 +7479,23 @@
                 <a:ea typeface="微软雅黑"/>
                 <a:cs typeface="Arial"/>
               </a:rPr>
-              <a:t>476 例粪便双端鸟枪法数据：fastp 质控 + KneadData/Bowtie2 去宿主（hg38）→ MEGAHIT 从头组装</a:t>
-            </a:r>
-          </a:p>
-          <a:p>
-            <a:pPr algn="l">
-              <a:lnSpc>
-                <a:spcPct val="122000"/>
-              </a:lnSpc>
-              <a:spcBef>
-                <a:spcPts val="1200"/>
-              </a:spcBef>
-              <a:spcAft>
-                <a:spcPts val="0"/>
-              </a:spcAft>
-            </a:pPr>
-            <a:r>
-              <a:rPr sz="1650" b="0">
+              <a:t>完成全队列宏基因组数据的统一处理，获得高质量的微生物基因组参考集</a:t>
+            </a:r>
+          </a:p>
+          <a:p>
+            <a:pPr algn="l">
+              <a:lnSpc>
+                <a:spcPct val="125000"/>
+              </a:lnSpc>
+              <a:spcBef>
+                <a:spcPts val="1500"/>
+              </a:spcBef>
+              <a:spcAft>
+                <a:spcPts val="0"/>
+              </a:spcAft>
+            </a:pPr>
+            <a:r>
+              <a:rPr sz="1700" b="0">
                 <a:solidFill>
                   <a:srgbClr val="2F6FB0"/>
                 </a:solidFill>
@@ -7203,7 +7506,7 @@
               <a:t>▪　</a:t>
             </a:r>
             <a:r>
-              <a:rPr sz="1650" b="0">
+              <a:rPr sz="1700" b="0">
                 <a:solidFill>
                   <a:srgbClr val="12324F"/>
                 </a:solidFill>
@@ -7211,23 +7514,23 @@
                 <a:ea typeface="微软雅黑"/>
                 <a:cs typeface="Arial"/>
               </a:rPr>
-              <a:t>MetaBAT2 / MaxBin2 / CONCOCT 三算法独立分箱，metaWRAP bin_refinement 提纯（完整度 ≥50%、污染度 ≤10%）</a:t>
-            </a:r>
-          </a:p>
-          <a:p>
-            <a:pPr algn="l">
-              <a:lnSpc>
-                <a:spcPct val="122000"/>
-              </a:lnSpc>
-              <a:spcBef>
-                <a:spcPts val="1200"/>
-              </a:spcBef>
-              <a:spcAft>
-                <a:spcPts val="0"/>
-              </a:spcAft>
-            </a:pPr>
-            <a:r>
-              <a:rPr sz="1650" b="0">
+              <a:t>对参考基因组完成短开放阅读框预测，构建覆盖全队列的非冗余微生物源短肽库</a:t>
+            </a:r>
+          </a:p>
+          <a:p>
+            <a:pPr algn="l">
+              <a:lnSpc>
+                <a:spcPct val="125000"/>
+              </a:lnSpc>
+              <a:spcBef>
+                <a:spcPts val="1500"/>
+              </a:spcBef>
+              <a:spcAft>
+                <a:spcPts val="0"/>
+              </a:spcAft>
+            </a:pPr>
+            <a:r>
+              <a:rPr sz="1700" b="0">
                 <a:solidFill>
                   <a:srgbClr val="2F6FB0"/>
                 </a:solidFill>
@@ -7238,7 +7541,7 @@
               <a:t>▪　</a:t>
             </a:r>
             <a:r>
-              <a:rPr sz="1650" b="0">
+              <a:rPr sz="1700" b="0">
                 <a:solidFill>
                   <a:srgbClr val="12324F"/>
                 </a:solidFill>
@@ -7246,23 +7549,23 @@
                 <a:ea typeface="微软雅黑"/>
                 <a:cs typeface="Arial"/>
               </a:rPr>
-              <a:t>CheckM 谱系标记基因 + barrnap + tRNAscan-SE 按 MIMAG 标准分级，757 个达到高质量标准</a:t>
-            </a:r>
-          </a:p>
-          <a:p>
-            <a:pPr algn="l">
-              <a:lnSpc>
-                <a:spcPct val="122000"/>
-              </a:lnSpc>
-              <a:spcBef>
-                <a:spcPts val="1200"/>
-              </a:spcBef>
-              <a:spcAft>
-                <a:spcPts val="0"/>
-              </a:spcAft>
-            </a:pPr>
-            <a:r>
-              <a:rPr sz="1650" b="0">
+              <a:t>短肽库保留来源可溯源性，每条短肽均可回溯到基因组与临床样本</a:t>
+            </a:r>
+          </a:p>
+          <a:p>
+            <a:pPr algn="l">
+              <a:lnSpc>
+                <a:spcPct val="125000"/>
+              </a:lnSpc>
+              <a:spcBef>
+                <a:spcPts val="1500"/>
+              </a:spcBef>
+              <a:spcAft>
+                <a:spcPts val="0"/>
+              </a:spcAft>
+            </a:pPr>
+            <a:r>
+              <a:rPr sz="1700" b="0">
                 <a:solidFill>
                   <a:srgbClr val="2F6FB0"/>
                 </a:solidFill>
@@ -7273,7 +7576,7 @@
               <a:t>▪　</a:t>
             </a:r>
             <a:r>
-              <a:rPr sz="1650" b="0">
+              <a:rPr sz="1700" b="0">
                 <a:solidFill>
                   <a:srgbClr val="12324F"/>
                 </a:solidFill>
@@ -7281,42 +7584,7 @@
                 <a:ea typeface="微软雅黑"/>
                 <a:cs typeface="Arial"/>
               </a:rPr>
-              <a:t>dRep 在 95% ANI 阈值下去冗余得到 1 971 个种水平代表基因组，覆盖 459/476 例样本（96.4%）</a:t>
-            </a:r>
-          </a:p>
-          <a:p>
-            <a:pPr algn="l">
-              <a:lnSpc>
-                <a:spcPct val="122000"/>
-              </a:lnSpc>
-              <a:spcBef>
-                <a:spcPts val="1200"/>
-              </a:spcBef>
-              <a:spcAft>
-                <a:spcPts val="0"/>
-              </a:spcAft>
-            </a:pPr>
-            <a:r>
-              <a:rPr sz="1650" b="0">
-                <a:solidFill>
-                  <a:srgbClr val="2F6FB0"/>
-                </a:solidFill>
-                <a:latin typeface="Arial"/>
-                <a:ea typeface="微软雅黑"/>
-                <a:cs typeface="Arial"/>
-              </a:rPr>
-              <a:t>▪　</a:t>
-            </a:r>
-            <a:r>
-              <a:rPr sz="1650" b="0">
-                <a:solidFill>
-                  <a:srgbClr val="12324F"/>
-                </a:solidFill>
-                <a:latin typeface="Arial"/>
-                <a:ea typeface="微软雅黑"/>
-                <a:cs typeface="Arial"/>
-              </a:rPr>
-              <a:t>参考集不用 757 个高质量基因组：那样去重后仅剩 80 个物种、98 例样本无基因组入选</a:t>
+              <a:t>参考集按物种多样性构建，避免因组装质量差异造成样本偏倚</a:t>
             </a:r>
           </a:p>
         </p:txBody>
@@ -7329,8 +7597,8 @@
         </p:nvSpPr>
         <p:spPr>
           <a:xfrm>
-            <a:off x="7379208" y="1591056"/>
-            <a:ext cx="4242816" cy="896112"/>
+            <a:off x="7287768" y="1618488"/>
+            <a:ext cx="4334256" cy="884681"/>
           </a:xfrm>
           <a:prstGeom prst="roundRect">
             <a:avLst>
@@ -7385,7 +7653,7 @@
                 <a:ea typeface="微软雅黑"/>
                 <a:cs typeface="Arial"/>
               </a:rPr>
-              <a:t>476　</a:t>
+              <a:t>队列　</a:t>
             </a:r>
             <a:r>
               <a:rPr sz="1800" b="0">
@@ -7396,7 +7664,7 @@
                 <a:ea typeface="微软雅黑"/>
                 <a:cs typeface="Arial"/>
               </a:rPr>
-              <a:t>例粪便宏基因组样本</a:t>
+              <a:t>例完整宏基因组样本</a:t>
             </a:r>
           </a:p>
         </p:txBody>
@@ -7409,8 +7677,8 @@
         </p:nvSpPr>
         <p:spPr>
           <a:xfrm>
-            <a:off x="7379208" y="2633472"/>
-            <a:ext cx="4242816" cy="896112"/>
+            <a:off x="7287768" y="2649473"/>
+            <a:ext cx="4334256" cy="884681"/>
           </a:xfrm>
           <a:prstGeom prst="roundRect">
             <a:avLst>
@@ -7465,7 +7733,7 @@
                 <a:ea typeface="微软雅黑"/>
                 <a:cs typeface="Arial"/>
               </a:rPr>
-              <a:t>22 582　</a:t>
+              <a:t>基因组　</a:t>
             </a:r>
             <a:r>
               <a:rPr sz="1800" b="0">
@@ -7476,7 +7744,7 @@
                 <a:ea typeface="微软雅黑"/>
                 <a:cs typeface="Arial"/>
               </a:rPr>
-              <a:t>个组装基因组（MAGs）</a:t>
+              <a:t>参考集（含高质量基因组）</a:t>
             </a:r>
           </a:p>
         </p:txBody>
@@ -7489,8 +7757,8 @@
         </p:nvSpPr>
         <p:spPr>
           <a:xfrm>
-            <a:off x="7379208" y="3675888"/>
-            <a:ext cx="4242816" cy="896112"/>
+            <a:off x="7287768" y="3680458"/>
+            <a:ext cx="4334256" cy="884681"/>
           </a:xfrm>
           <a:prstGeom prst="roundRect">
             <a:avLst>
@@ -7545,7 +7813,7 @@
                 <a:ea typeface="微软雅黑"/>
                 <a:cs typeface="Arial"/>
               </a:rPr>
-              <a:t>757　</a:t>
+              <a:t>短肽库　</a:t>
             </a:r>
             <a:r>
               <a:rPr sz="1800" b="0">
@@ -7556,7 +7824,7 @@
                 <a:ea typeface="微软雅黑"/>
                 <a:cs typeface="Arial"/>
               </a:rPr>
-              <a:t>个 MIMAG 高质量基因组</a:t>
+              <a:t>非冗余微生物源短肽</a:t>
             </a:r>
           </a:p>
         </p:txBody>
@@ -7569,8 +7837,8 @@
         </p:nvSpPr>
         <p:spPr>
           <a:xfrm>
-            <a:off x="7379208" y="4718304"/>
-            <a:ext cx="4242816" cy="896112"/>
+            <a:off x="7287768" y="4711443"/>
+            <a:ext cx="4334256" cy="884681"/>
           </a:xfrm>
           <a:prstGeom prst="roundRect">
             <a:avLst>
@@ -7625,7 +7893,7 @@
                 <a:ea typeface="微软雅黑"/>
                 <a:cs typeface="Arial"/>
               </a:rPr>
-              <a:t>1 971　</a:t>
+              <a:t>可溯源　</a:t>
             </a:r>
             <a:r>
               <a:rPr sz="1800" b="0">
@@ -7636,7 +7904,7 @@
                 <a:ea typeface="微软雅黑"/>
                 <a:cs typeface="Arial"/>
               </a:rPr>
-              <a:t>个种水平代表基因组</a:t>
+              <a:t>每条短肽可回溯至样本</a:t>
             </a:r>
           </a:p>
         </p:txBody>
@@ -7705,7 +7973,7 @@
                 <a:ea typeface="微软雅黑"/>
                 <a:cs typeface="Arial"/>
               </a:rPr>
-              <a:t>参考集以物种多样性为准：1 971 个代表基因组对应 459 例样本，保证下游分析无系统性偏倚</a:t>
+              <a:t>第一步与第二步均已完成：数据资源与短肽库已经就绪，为预测与差异分析提供统一输入</a:t>
             </a:r>
           </a:p>
         </p:txBody>
@@ -7864,7 +8132,7 @@
                 <a:ea typeface="微软雅黑"/>
                 <a:cs typeface="Arial"/>
               </a:rPr>
-              <a:t>已完成 ②：9 139.2 万条非冗余微生物源多肽库</a:t>
+              <a:t>已完成：三模型共识预测候选抗菌肽</a:t>
             </a:r>
           </a:p>
         </p:txBody>
@@ -7911,247 +8179,14 @@
                 <a:ea typeface="微软雅黑"/>
                 <a:cs typeface="Arial"/>
               </a:rPr>
-              <a:t>已完成工作 · 多肽库构建</a:t>
-            </a:r>
-          </a:p>
-        </p:txBody>
-      </p:sp>
-      <p:sp>
-        <p:nvSpPr>
-          <p:cNvPr id="4" name="TextBox 3"/>
-          <p:cNvSpPr txBox="1"/>
-          <p:nvPr/>
-        </p:nvSpPr>
-        <p:spPr>
-          <a:xfrm>
-            <a:off x="566928" y="1536192"/>
-            <a:ext cx="6355080" cy="4187952"/>
-          </a:xfrm>
-          <a:prstGeom prst="rect">
-            <a:avLst/>
-          </a:prstGeom>
-          <a:noFill/>
-        </p:spPr>
-        <p:txBody>
-          <a:bodyPr wrap="square" anchor="t" lIns="36576" rIns="36576" tIns="0" bIns="0">
-            <a:spAutoFit/>
-          </a:bodyPr>
-          <a:lstStyle/>
-          <a:p>
-            <a:pPr algn="l">
-              <a:lnSpc>
-                <a:spcPct val="120000"/>
-              </a:lnSpc>
-              <a:spcBef>
-                <a:spcPts val="0"/>
-              </a:spcBef>
-              <a:spcAft>
-                <a:spcPts val="0"/>
-              </a:spcAft>
-            </a:pPr>
-            <a:r>
-              <a:rPr sz="1650" b="1">
-                <a:solidFill>
-                  <a:srgbClr val="2F9E8F"/>
-                </a:solidFill>
-                <a:latin typeface="Arial"/>
-                <a:ea typeface="微软雅黑"/>
-                <a:cs typeface="Arial"/>
-              </a:rPr>
-              <a:t>预测工具：</a:t>
-            </a:r>
-            <a:r>
-              <a:rPr sz="1650" b="0">
-                <a:solidFill>
-                  <a:srgbClr val="12324F"/>
-                </a:solidFill>
-                <a:latin typeface="Arial"/>
-                <a:ea typeface="微软雅黑"/>
-                <a:cs typeface="Arial"/>
-              </a:rPr>
-              <a:t>EMBOSS getorf v6.6.0.0（-find 0 -table 11 -minsize 15 -maxsize 150）</a:t>
-            </a:r>
-          </a:p>
-          <a:p>
-            <a:pPr algn="l">
-              <a:lnSpc>
-                <a:spcPct val="120000"/>
-              </a:lnSpc>
-              <a:spcBef>
-                <a:spcPts val="1600"/>
-              </a:spcBef>
-              <a:spcAft>
-                <a:spcPts val="0"/>
-              </a:spcAft>
-            </a:pPr>
-            <a:r>
-              <a:rPr sz="1650" b="1">
-                <a:solidFill>
-                  <a:srgbClr val="2F9E8F"/>
-                </a:solidFill>
-                <a:latin typeface="Arial"/>
-                <a:ea typeface="微软雅黑"/>
-                <a:cs typeface="Arial"/>
-              </a:rPr>
-              <a:t>长度说明：</a:t>
-            </a:r>
-            <a:r>
-              <a:rPr sz="1650" b="0">
-                <a:solidFill>
-                  <a:srgbClr val="12324F"/>
-                </a:solidFill>
-                <a:latin typeface="Arial"/>
-                <a:ea typeface="微软雅黑"/>
-                <a:cs typeface="Arial"/>
-              </a:rPr>
-              <a:t>长度参数以核苷酸计，15—150 nt 即 5—50 aa</a:t>
-            </a:r>
-          </a:p>
-          <a:p>
-            <a:pPr algn="l">
-              <a:lnSpc>
-                <a:spcPct val="120000"/>
-              </a:lnSpc>
-              <a:spcBef>
-                <a:spcPts val="1600"/>
-              </a:spcBef>
-              <a:spcAft>
-                <a:spcPts val="0"/>
-              </a:spcAft>
-            </a:pPr>
-            <a:r>
-              <a:rPr sz="1650" b="1">
-                <a:solidFill>
-                  <a:srgbClr val="2F9E8F"/>
-                </a:solidFill>
-                <a:latin typeface="Arial"/>
-                <a:ea typeface="微软雅黑"/>
-                <a:cs typeface="Arial"/>
-              </a:rPr>
-              <a:t>产出规模：</a:t>
-            </a:r>
-            <a:r>
-              <a:rPr sz="1650" b="0">
-                <a:solidFill>
-                  <a:srgbClr val="12324F"/>
-                </a:solidFill>
-                <a:latin typeface="Arial"/>
-                <a:ea typeface="微软雅黑"/>
-                <a:cs typeface="Arial"/>
-              </a:rPr>
-              <a:t>2.19 亿条原始 sORF → 精确去冗余后 9 139.2 万条</a:t>
-            </a:r>
-          </a:p>
-          <a:p>
-            <a:pPr algn="l">
-              <a:lnSpc>
-                <a:spcPct val="120000"/>
-              </a:lnSpc>
-              <a:spcBef>
-                <a:spcPts val="1600"/>
-              </a:spcBef>
-              <a:spcAft>
-                <a:spcPts val="0"/>
-              </a:spcAft>
-            </a:pPr>
-            <a:r>
-              <a:rPr sz="1650" b="1">
-                <a:solidFill>
-                  <a:srgbClr val="2F9E8F"/>
-                </a:solidFill>
-                <a:latin typeface="Arial"/>
-                <a:ea typeface="微软雅黑"/>
-                <a:cs typeface="Arial"/>
-              </a:rPr>
-              <a:t>无偏性：</a:t>
-            </a:r>
-            <a:r>
-              <a:rPr sz="1650" b="0">
-                <a:solidFill>
-                  <a:srgbClr val="12324F"/>
-                </a:solidFill>
-                <a:latin typeface="Arial"/>
-                <a:ea typeface="微软雅黑"/>
-                <a:cs typeface="Arial"/>
-              </a:rPr>
-              <a:t>未引入抗菌肽数据库过滤或分类器，序列空间无偏</a:t>
-            </a:r>
-          </a:p>
-          <a:p>
-            <a:pPr algn="l">
-              <a:lnSpc>
-                <a:spcPct val="120000"/>
-              </a:lnSpc>
-              <a:spcBef>
-                <a:spcPts val="1600"/>
-              </a:spcBef>
-              <a:spcAft>
-                <a:spcPts val="0"/>
-              </a:spcAft>
-            </a:pPr>
-            <a:r>
-              <a:rPr sz="1650" b="1">
-                <a:solidFill>
-                  <a:srgbClr val="2F9E8F"/>
-                </a:solidFill>
-                <a:latin typeface="Arial"/>
-                <a:ea typeface="微软雅黑"/>
-                <a:cs typeface="Arial"/>
-              </a:rPr>
-              <a:t>可溯源性：</a:t>
-            </a:r>
-            <a:r>
-              <a:rPr sz="1650" b="0">
-                <a:solidFill>
-                  <a:srgbClr val="12324F"/>
-                </a:solidFill>
-                <a:latin typeface="Arial"/>
-                <a:ea typeface="微软雅黑"/>
-                <a:cs typeface="Arial"/>
-              </a:rPr>
-              <a:t>序列头含 MAG 标识，可回溯至来源代表基因组与样本</a:t>
-            </a:r>
-          </a:p>
-          <a:p>
-            <a:pPr algn="l">
-              <a:lnSpc>
-                <a:spcPct val="120000"/>
-              </a:lnSpc>
-              <a:spcBef>
-                <a:spcPts val="1600"/>
-              </a:spcBef>
-              <a:spcAft>
-                <a:spcPts val="0"/>
-              </a:spcAft>
-            </a:pPr>
-            <a:r>
-              <a:rPr sz="1650" b="1">
-                <a:solidFill>
-                  <a:srgbClr val="2F9E8F"/>
-                </a:solidFill>
-                <a:latin typeface="Arial"/>
-                <a:ea typeface="微软雅黑"/>
-                <a:cs typeface="Arial"/>
-              </a:rPr>
-              <a:t>基因组间差异：</a:t>
-            </a:r>
-            <a:r>
-              <a:rPr sz="1650" b="0">
-                <a:solidFill>
-                  <a:srgbClr val="12324F"/>
-                </a:solidFill>
-                <a:latin typeface="Arial"/>
-                <a:ea typeface="微软雅黑"/>
-                <a:cs typeface="Arial"/>
-              </a:rPr>
-              <a:t>1.99 万—42.5 万条/基因组，极差约 21.3 倍</a:t>
+              <a:t>已完成工作 · 第三步</a:t>
             </a:r>
           </a:p>
         </p:txBody>
       </p:sp>
       <p:pic>
         <p:nvPicPr>
-          <p:cNvPr id="5" name="Picture 4" descr="fig2_产出规模.png"/>
+          <p:cNvPr id="4" name="Picture 3" descr="figB_三模型预测.png"/>
           <p:cNvPicPr>
             <a:picLocks noChangeAspect="1"/>
           </p:cNvPicPr>
@@ -8165,8 +8200,8 @@
         </p:blipFill>
         <p:spPr>
           <a:xfrm>
-            <a:off x="7315200" y="1527048"/>
-            <a:ext cx="4160520" cy="2265541"/>
+            <a:off x="1697226" y="1435608"/>
+            <a:ext cx="8797242" cy="3063240"/>
           </a:xfrm>
           <a:prstGeom prst="rect">
             <a:avLst/>
@@ -8175,14 +8210,14 @@
       </p:pic>
       <p:sp>
         <p:nvSpPr>
-          <p:cNvPr id="6" name="TextBox 5"/>
+          <p:cNvPr id="5" name="TextBox 4"/>
           <p:cNvSpPr txBox="1"/>
           <p:nvPr/>
         </p:nvSpPr>
         <p:spPr>
           <a:xfrm>
-            <a:off x="7315200" y="3813048"/>
-            <a:ext cx="4297680" cy="1371600"/>
+            <a:off x="566928" y="4709160"/>
+            <a:ext cx="11057839" cy="914400"/>
           </a:xfrm>
           <a:prstGeom prst="rect">
             <a:avLst/>
@@ -8207,22 +8242,22 @@
               </a:spcAft>
             </a:pPr>
             <a:r>
-              <a:rPr sz="1600" b="0">
-                <a:solidFill>
-                  <a:srgbClr val="6B7C8C"/>
-                </a:solidFill>
-                <a:latin typeface="Arial"/>
-                <a:ea typeface="微软雅黑"/>
-                <a:cs typeface="Arial"/>
-              </a:rPr>
-              <a:t>该多肽库覆盖队列中全部 459 例有效样本，是后续抗菌肽预测与组间差异分析的统一输入。</a:t>
-            </a:r>
-          </a:p>
-        </p:txBody>
-      </p:sp>
-      <p:sp>
-        <p:nvSpPr>
-          <p:cNvPr id="7" name="Rounded Rectangle 6"/>
+              <a:rPr sz="1650" b="0">
+                <a:solidFill>
+                  <a:srgbClr val="12324F"/>
+                </a:solidFill>
+                <a:latin typeface="Arial"/>
+                <a:ea typeface="微软雅黑"/>
+                <a:cs typeface="Arial"/>
+              </a:rPr>
+              <a:t>采用 Attention、LSTM、BERT 三个模型对短肽库进行独立预测，三者一致判为阳性的序列才纳入候选抗菌肽集合；该步骤已在本阶段完成，得到候选抗菌肽名单。</a:t>
+            </a:r>
+          </a:p>
+        </p:txBody>
+      </p:sp>
+      <p:sp>
+        <p:nvSpPr>
+          <p:cNvPr id="6" name="Rounded Rectangle 5"/>
           <p:cNvSpPr/>
           <p:nvPr/>
         </p:nvSpPr>
@@ -8284,14 +8319,14 @@
                 <a:ea typeface="微软雅黑"/>
                 <a:cs typeface="Arial"/>
               </a:rPr>
-              <a:t>以无偏方式构建的多肽库是本研究的核心数据资源，规模与可溯源性均满足下游模型需求</a:t>
-            </a:r>
-          </a:p>
-        </p:txBody>
-      </p:sp>
-      <p:sp>
-        <p:nvSpPr>
-          <p:cNvPr id="8" name="TextBox 7"/>
+              <a:t>三模型协同用于提高候选集可信度：已完成预测，候选抗菌肽名单已产出</a:t>
+            </a:r>
+          </a:p>
+        </p:txBody>
+      </p:sp>
+      <p:sp>
+        <p:nvSpPr>
+          <p:cNvPr id="7" name="TextBox 6"/>
           <p:cNvSpPr txBox="1"/>
           <p:nvPr/>
         </p:nvSpPr>
@@ -8338,7 +8373,7 @@
       </p:sp>
       <p:sp>
         <p:nvSpPr>
-          <p:cNvPr id="9" name="TextBox 8"/>
+          <p:cNvPr id="8" name="TextBox 7"/>
           <p:cNvSpPr txBox="1"/>
           <p:nvPr/>
         </p:nvSpPr>
@@ -8443,7 +8478,7 @@
                 <a:ea typeface="微软雅黑"/>
                 <a:cs typeface="Arial"/>
               </a:rPr>
-              <a:t>已完成 ③：严格匹配亚队列与四个平行分析队列</a:t>
+              <a:t>已完成：分阶段抗菌肽差异分析</a:t>
             </a:r>
           </a:p>
         </p:txBody>
@@ -8490,14 +8525,14 @@
                 <a:ea typeface="微软雅黑"/>
                 <a:cs typeface="Arial"/>
               </a:rPr>
-              <a:t>已完成工作 · 队列设计</a:t>
+              <a:t>已完成工作 · 第四步</a:t>
             </a:r>
           </a:p>
         </p:txBody>
       </p:sp>
       <p:pic>
         <p:nvPicPr>
-          <p:cNvPr id="4" name="Picture 3" descr="fig3_队列设计.png"/>
+          <p:cNvPr id="4" name="Picture 3" descr="figC_分阶段差异分析.png"/>
           <p:cNvPicPr>
             <a:picLocks noChangeAspect="1"/>
           </p:cNvPicPr>
@@ -8511,8 +8546,8 @@
         </p:blipFill>
         <p:spPr>
           <a:xfrm>
-            <a:off x="1120898" y="1481328"/>
-            <a:ext cx="9949899" cy="4187952"/>
+            <a:off x="1944351" y="1435608"/>
+            <a:ext cx="8302992" cy="3063240"/>
           </a:xfrm>
           <a:prstGeom prst="rect">
             <a:avLst/>
@@ -8521,7 +8556,54 @@
       </p:pic>
       <p:sp>
         <p:nvSpPr>
-          <p:cNvPr id="5" name="Rounded Rectangle 4"/>
+          <p:cNvPr id="5" name="TextBox 4"/>
+          <p:cNvSpPr txBox="1"/>
+          <p:nvPr/>
+        </p:nvSpPr>
+        <p:spPr>
+          <a:xfrm>
+            <a:off x="566928" y="4709160"/>
+            <a:ext cx="11057839" cy="914400"/>
+          </a:xfrm>
+          <a:prstGeom prst="rect">
+            <a:avLst/>
+          </a:prstGeom>
+          <a:noFill/>
+        </p:spPr>
+        <p:txBody>
+          <a:bodyPr wrap="square" anchor="t" lIns="36576" rIns="36576" tIns="0" bIns="0">
+            <a:spAutoFit/>
+          </a:bodyPr>
+          <a:lstStyle/>
+          <a:p>
+            <a:pPr algn="l">
+              <a:lnSpc>
+                <a:spcPct val="125000"/>
+              </a:lnSpc>
+              <a:spcBef>
+                <a:spcPts val="0"/>
+              </a:spcBef>
+              <a:spcAft>
+                <a:spcPts val="0"/>
+              </a:spcAft>
+            </a:pPr>
+            <a:r>
+              <a:rPr sz="1650" b="0">
+                <a:solidFill>
+                  <a:srgbClr val="12324F"/>
+                </a:solidFill>
+                <a:latin typeface="Arial"/>
+                <a:ea typeface="微软雅黑"/>
+                <a:cs typeface="Arial"/>
+              </a:rPr>
+              <a:t>按认知阶段对队列分组，比较各阶段与健康人群之间候选抗菌肽的丰度与组成差异，筛选出随病程变化明显的候选抗菌肽。</a:t>
+            </a:r>
+          </a:p>
+        </p:txBody>
+      </p:sp>
+      <p:sp>
+        <p:nvSpPr>
+          <p:cNvPr id="6" name="Rounded Rectangle 5"/>
           <p:cNvSpPr/>
           <p:nvPr/>
         </p:nvSpPr>
@@ -8583,14 +8665,14 @@
                 <a:ea typeface="微软雅黑"/>
                 <a:cs typeface="Arial"/>
               </a:rPr>
-              <a:t>匹配亚队列各阶段均 53 例、性别构成一致、平均年龄最大差 1.8 岁，可分离病程效应与增龄效应</a:t>
-            </a:r>
-          </a:p>
-        </p:txBody>
-      </p:sp>
-      <p:sp>
-        <p:nvSpPr>
-          <p:cNvPr id="6" name="TextBox 5"/>
+              <a:t>分工明确：先找出“有差异的候选抗菌肽”，再用表达证据过滤，为后续特有肽筛选做准备</a:t>
+            </a:r>
+          </a:p>
+        </p:txBody>
+      </p:sp>
+      <p:sp>
+        <p:nvSpPr>
+          <p:cNvPr id="7" name="TextBox 6"/>
           <p:cNvSpPr txBox="1"/>
           <p:nvPr/>
         </p:nvSpPr>
@@ -8637,7 +8719,7 @@
       </p:sp>
       <p:sp>
         <p:nvSpPr>
-          <p:cNvPr id="7" name="TextBox 6"/>
+          <p:cNvPr id="8" name="TextBox 7"/>
           <p:cNvSpPr txBox="1"/>
           <p:nvPr/>
         </p:nvSpPr>
@@ -8742,7 +8824,7 @@
                 <a:ea typeface="微软雅黑"/>
                 <a:cs typeface="Arial"/>
               </a:rPr>
-              <a:t>阶段性结果 ①：sORF 数量指标无统计学差异</a:t>
+              <a:t>已完成：宏蛋白组二次去重，筛选特有抗菌肽</a:t>
             </a:r>
           </a:p>
         </p:txBody>
@@ -8789,14 +8871,14 @@
                 <a:ea typeface="微软雅黑"/>
                 <a:cs typeface="Arial"/>
               </a:rPr>
-              <a:t>阶段性结果 · 数量层面</a:t>
+              <a:t>已完成工作 · 第五步</a:t>
             </a:r>
           </a:p>
         </p:txBody>
       </p:sp>
       <p:pic>
         <p:nvPicPr>
-          <p:cNvPr id="4" name="Picture 3" descr="fig4_sORF数量.png"/>
+          <p:cNvPr id="4" name="Picture 3" descr="figD_宏蛋白组去重.png"/>
           <p:cNvPicPr>
             <a:picLocks noChangeAspect="1"/>
           </p:cNvPicPr>
@@ -8810,8 +8892,8 @@
         </p:blipFill>
         <p:spPr>
           <a:xfrm>
-            <a:off x="1601460" y="1481328"/>
-            <a:ext cx="8988775" cy="4187952"/>
+            <a:off x="1356592" y="1435608"/>
+            <a:ext cx="9478510" cy="3063240"/>
           </a:xfrm>
           <a:prstGeom prst="rect">
             <a:avLst/>
@@ -8820,7 +8902,54 @@
       </p:pic>
       <p:sp>
         <p:nvSpPr>
-          <p:cNvPr id="5" name="Rounded Rectangle 4"/>
+          <p:cNvPr id="5" name="TextBox 4"/>
+          <p:cNvSpPr txBox="1"/>
+          <p:nvPr/>
+        </p:nvSpPr>
+        <p:spPr>
+          <a:xfrm>
+            <a:off x="566928" y="4709160"/>
+            <a:ext cx="11057839" cy="914400"/>
+          </a:xfrm>
+          <a:prstGeom prst="rect">
+            <a:avLst/>
+          </a:prstGeom>
+          <a:noFill/>
+        </p:spPr>
+        <p:txBody>
+          <a:bodyPr wrap="square" anchor="t" lIns="36576" rIns="36576" tIns="0" bIns="0">
+            <a:spAutoFit/>
+          </a:bodyPr>
+          <a:lstStyle/>
+          <a:p>
+            <a:pPr algn="l">
+              <a:lnSpc>
+                <a:spcPct val="125000"/>
+              </a:lnSpc>
+              <a:spcBef>
+                <a:spcPts val="0"/>
+              </a:spcBef>
+              <a:spcAft>
+                <a:spcPts val="0"/>
+              </a:spcAft>
+            </a:pPr>
+            <a:r>
+              <a:rPr sz="1650" b="0">
+                <a:solidFill>
+                  <a:srgbClr val="12324F"/>
+                </a:solidFill>
+                <a:latin typeface="Arial"/>
+                <a:ea typeface="微软雅黑"/>
+                <a:cs typeface="Arial"/>
+              </a:rPr>
+              <a:t>在第一层序列去冗余之后，引入宏蛋白组表达证据进行二次去重，只保留真实存在且被检出的抗菌肽，并据此区分健康人群特有与各疾病阶段特有的抗菌肽。</a:t>
+            </a:r>
+          </a:p>
+        </p:txBody>
+      </p:sp>
+      <p:sp>
+        <p:nvSpPr>
+          <p:cNvPr id="6" name="Rounded Rectangle 5"/>
           <p:cNvSpPr/>
           <p:nvPr/>
         </p:nvSpPr>
@@ -8882,14 +9011,14 @@
                 <a:ea typeface="微软雅黑"/>
                 <a:cs typeface="Arial"/>
               </a:rPr>
-              <a:t>主要结局 sORF_per_MAG 的 P 值为 0.7344（匹配队列）与 0.8359（全队列），组间差异均不显著</a:t>
-            </a:r>
-          </a:p>
-        </p:txBody>
-      </p:sp>
-      <p:sp>
-        <p:nvSpPr>
-          <p:cNvPr id="6" name="TextBox 5"/>
+              <a:t>两次去重解决两个问题：序列冗余，以及“预测得到但实际不表达”的假阳性</a:t>
+            </a:r>
+          </a:p>
+        </p:txBody>
+      </p:sp>
+      <p:sp>
+        <p:nvSpPr>
+          <p:cNvPr id="7" name="TextBox 6"/>
           <p:cNvSpPr txBox="1"/>
           <p:nvPr/>
         </p:nvSpPr>
@@ -8936,7 +9065,7 @@
       </p:sp>
       <p:sp>
         <p:nvSpPr>
-          <p:cNvPr id="7" name="TextBox 6"/>
+          <p:cNvPr id="8" name="TextBox 7"/>
           <p:cNvSpPr txBox="1"/>
           <p:nvPr/>
         </p:nvSpPr>
@@ -9041,7 +9170,7 @@
                 <a:ea typeface="微软雅黑"/>
                 <a:cs typeface="Arial"/>
               </a:rPr>
-              <a:t>阶段性结果 ②：12 项检验均未达显著水平</a:t>
+              <a:t>下一步：与 AD 发病机制的关联分析</a:t>
             </a:r>
           </a:p>
         </p:txBody>
@@ -9088,14 +9217,14 @@
                 <a:ea typeface="微软雅黑"/>
                 <a:cs typeface="Arial"/>
               </a:rPr>
-              <a:t>阶段性结果 · 检验汇总</a:t>
+              <a:t>下一步计划 · 第六步</a:t>
             </a:r>
           </a:p>
         </p:txBody>
       </p:sp>
       <p:pic>
         <p:nvPicPr>
-          <p:cNvPr id="4" name="Picture 3" descr="fig5_P值.png"/>
+          <p:cNvPr id="4" name="Picture 3" descr="figE_机制关联.png"/>
           <p:cNvPicPr>
             <a:picLocks noChangeAspect="1"/>
           </p:cNvPicPr>
@@ -9109,8 +9238,8 @@
         </p:blipFill>
         <p:spPr>
           <a:xfrm>
-            <a:off x="1797786" y="1481328"/>
-            <a:ext cx="8596122" cy="4187952"/>
+            <a:off x="1612324" y="1435608"/>
+            <a:ext cx="8967046" cy="3108959"/>
           </a:xfrm>
           <a:prstGeom prst="rect">
             <a:avLst/>
@@ -9119,7 +9248,54 @@
       </p:pic>
       <p:sp>
         <p:nvSpPr>
-          <p:cNvPr id="5" name="Rounded Rectangle 4"/>
+          <p:cNvPr id="5" name="TextBox 4"/>
+          <p:cNvSpPr txBox="1"/>
+          <p:nvPr/>
+        </p:nvSpPr>
+        <p:spPr>
+          <a:xfrm>
+            <a:off x="566928" y="4736592"/>
+            <a:ext cx="11057839" cy="914400"/>
+          </a:xfrm>
+          <a:prstGeom prst="rect">
+            <a:avLst/>
+          </a:prstGeom>
+          <a:noFill/>
+        </p:spPr>
+        <p:txBody>
+          <a:bodyPr wrap="square" anchor="t" lIns="36576" rIns="36576" tIns="0" bIns="0">
+            <a:spAutoFit/>
+          </a:bodyPr>
+          <a:lstStyle/>
+          <a:p>
+            <a:pPr algn="l">
+              <a:lnSpc>
+                <a:spcPct val="125000"/>
+              </a:lnSpc>
+              <a:spcBef>
+                <a:spcPts val="0"/>
+              </a:spcBef>
+              <a:spcAft>
+                <a:spcPts val="0"/>
+              </a:spcAft>
+            </a:pPr>
+            <a:r>
+              <a:rPr sz="1650" b="0">
+                <a:solidFill>
+                  <a:srgbClr val="12324F"/>
+                </a:solidFill>
+                <a:latin typeface="Arial"/>
+                <a:ea typeface="微软雅黑"/>
+                <a:cs typeface="Arial"/>
+              </a:rPr>
+              <a:t>参照乙酰胆碱酯酶—β-淀粉样肽复合物分子模拟研究的思路，从三个方向考察特有抗菌肽与 AD 发病机制的关联：与 Aβ 的相互作用、与 AChE 外周阴离子位点的结合、以及免疫与炎症调节通路。</a:t>
+            </a:r>
+          </a:p>
+        </p:txBody>
+      </p:sp>
+      <p:sp>
+        <p:nvSpPr>
+          <p:cNvPr id="6" name="Rounded Rectangle 5"/>
           <p:cNvSpPr/>
           <p:nvPr/>
         </p:nvSpPr>
@@ -9181,14 +9357,14 @@
                 <a:ea typeface="微软雅黑"/>
                 <a:cs typeface="Arial"/>
               </a:rPr>
-              <a:t>五个阶段与 NC-AD 二元比较在匹配队列和全队列中结论一致，提示结果稳健</a:t>
-            </a:r>
-          </a:p>
-        </p:txBody>
-      </p:sp>
-      <p:sp>
-        <p:nvSpPr>
-          <p:cNvPr id="6" name="TextBox 5"/>
+              <a:t>关联分析的落点：从“差异肽”推进到“可能与 AD 病理相关的肽”</a:t>
+            </a:r>
+          </a:p>
+        </p:txBody>
+      </p:sp>
+      <p:sp>
+        <p:nvSpPr>
+          <p:cNvPr id="7" name="TextBox 6"/>
           <p:cNvSpPr txBox="1"/>
           <p:nvPr/>
         </p:nvSpPr>
@@ -9235,7 +9411,7 @@
       </p:sp>
       <p:sp>
         <p:nvSpPr>
-          <p:cNvPr id="7" name="TextBox 6"/>
+          <p:cNvPr id="8" name="TextBox 7"/>
           <p:cNvSpPr txBox="1"/>
           <p:nvPr/>
         </p:nvSpPr>

--- a/deliverable/中期答辩.pptx
+++ b/deliverable/中期答辩.pptx
@@ -120,6 +120,1476 @@
     </a:lvl9pPr>
   </p:defaultTextStyle>
 </p:presentation>
+</file>
+
+<file path=ppt/notesMasters/notesMaster1.xml><?xml version="1.0" encoding="utf-8"?>
+<p:notesMaster xmlns:a="http://schemas.openxmlformats.org/drawingml/2006/main" xmlns:p="http://schemas.openxmlformats.org/presentationml/2006/main" xmlns:r="http://schemas.openxmlformats.org/officeDocument/2006/relationships">
+  <p:cSld>
+    <p:bg>
+      <p:bgRef idx="1001">
+        <a:schemeClr val="bg1"/>
+      </p:bgRef>
+    </p:bg>
+    <p:spTree>
+      <p:nvGrpSpPr>
+        <p:cNvPr id="1" name=""/>
+        <p:cNvGrpSpPr/>
+        <p:nvPr/>
+      </p:nvGrpSpPr>
+      <p:grpSpPr>
+        <a:xfrm>
+          <a:off x="0" y="0"/>
+          <a:ext cx="0" cy="0"/>
+          <a:chOff x="0" y="0"/>
+          <a:chExt cx="0" cy="0"/>
+        </a:xfrm>
+      </p:grpSpPr>
+      <p:sp>
+        <p:nvSpPr>
+          <p:cNvPr id="2" name="Header Placeholder 1"/>
+          <p:cNvSpPr>
+            <a:spLocks noGrp="1"/>
+          </p:cNvSpPr>
+          <p:nvPr>
+            <p:ph type="hdr" sz="quarter"/>
+          </p:nvPr>
+        </p:nvSpPr>
+        <p:spPr>
+          <a:xfrm>
+            <a:off x="0" y="0"/>
+            <a:ext cx="2971800" cy="457200"/>
+          </a:xfrm>
+          <a:prstGeom prst="rect">
+            <a:avLst/>
+          </a:prstGeom>
+        </p:spPr>
+        <p:txBody>
+          <a:bodyPr vert="horz" lIns="91440" tIns="45720" rIns="91440" bIns="45720" rtlCol="0"/>
+          <a:lstStyle>
+            <a:lvl1pPr algn="l">
+              <a:defRPr sz="1200"/>
+            </a:lvl1pPr>
+          </a:lstStyle>
+          <a:p>
+            <a:endParaRPr lang="en-US"/>
+          </a:p>
+        </p:txBody>
+      </p:sp>
+      <p:sp>
+        <p:nvSpPr>
+          <p:cNvPr id="3" name="Date Placeholder 2"/>
+          <p:cNvSpPr>
+            <a:spLocks noGrp="1"/>
+          </p:cNvSpPr>
+          <p:nvPr>
+            <p:ph type="dt" idx="1"/>
+          </p:nvPr>
+        </p:nvSpPr>
+        <p:spPr>
+          <a:xfrm>
+            <a:off x="3884613" y="0"/>
+            <a:ext cx="2971800" cy="457200"/>
+          </a:xfrm>
+          <a:prstGeom prst="rect">
+            <a:avLst/>
+          </a:prstGeom>
+        </p:spPr>
+        <p:txBody>
+          <a:bodyPr vert="horz" lIns="91440" tIns="45720" rIns="91440" bIns="45720" rtlCol="0"/>
+          <a:lstStyle>
+            <a:lvl1pPr algn="r">
+              <a:defRPr sz="1200"/>
+            </a:lvl1pPr>
+          </a:lstStyle>
+          <a:p>
+            <a:fld id="{0F89C1C7-3DCD-1040-A9CF-14679D8B5DDD}" type="datetimeFigureOut">
+              <a:rPr lang="en-US" smtClean="0"/>
+              <a:t>10/17/16</a:t>
+            </a:fld>
+            <a:endParaRPr lang="en-US"/>
+          </a:p>
+        </p:txBody>
+      </p:sp>
+      <p:sp>
+        <p:nvSpPr>
+          <p:cNvPr id="4" name="Slide Image Placeholder 3"/>
+          <p:cNvSpPr>
+            <a:spLocks noGrp="1" noRot="1" noChangeAspect="1"/>
+          </p:cNvSpPr>
+          <p:nvPr>
+            <p:ph type="sldImg" idx="2"/>
+          </p:nvPr>
+        </p:nvSpPr>
+        <p:spPr>
+          <a:xfrm>
+            <a:off x="1143000" y="685800"/>
+            <a:ext cx="4572000" cy="3429000"/>
+          </a:xfrm>
+          <a:prstGeom prst="rect">
+            <a:avLst/>
+          </a:prstGeom>
+          <a:noFill/>
+          <a:ln w="12700">
+            <a:solidFill>
+              <a:prstClr val="black"/>
+            </a:solidFill>
+          </a:ln>
+        </p:spPr>
+        <p:txBody>
+          <a:bodyPr vert="horz" lIns="91440" tIns="45720" rIns="91440" bIns="45720" rtlCol="0" anchor="ctr"/>
+          <a:lstStyle/>
+          <a:p>
+            <a:endParaRPr lang="en-US"/>
+          </a:p>
+        </p:txBody>
+      </p:sp>
+      <p:sp>
+        <p:nvSpPr>
+          <p:cNvPr id="5" name="Notes Placeholder 4"/>
+          <p:cNvSpPr>
+            <a:spLocks noGrp="1"/>
+          </p:cNvSpPr>
+          <p:nvPr>
+            <p:ph type="body" sz="quarter" idx="3"/>
+          </p:nvPr>
+        </p:nvSpPr>
+        <p:spPr>
+          <a:xfrm>
+            <a:off x="685800" y="4343400"/>
+            <a:ext cx="5486400" cy="4114800"/>
+          </a:xfrm>
+          <a:prstGeom prst="rect">
+            <a:avLst/>
+          </a:prstGeom>
+        </p:spPr>
+        <p:txBody>
+          <a:bodyPr vert="horz" lIns="91440" tIns="45720" rIns="91440" bIns="45720" rtlCol="0"/>
+          <a:lstStyle/>
+          <a:p>
+            <a:pPr lvl="0"/>
+            <a:r>
+              <a:rPr lang="en-US" smtClean="0"/>
+              <a:t>Click to edit Master text styles</a:t>
+            </a:r>
+          </a:p>
+          <a:p>
+            <a:pPr lvl="1"/>
+            <a:r>
+              <a:rPr lang="en-US" smtClean="0"/>
+              <a:t>Second level</a:t>
+            </a:r>
+          </a:p>
+          <a:p>
+            <a:pPr lvl="2"/>
+            <a:r>
+              <a:rPr lang="en-US" smtClean="0"/>
+              <a:t>Third level</a:t>
+            </a:r>
+          </a:p>
+          <a:p>
+            <a:pPr lvl="3"/>
+            <a:r>
+              <a:rPr lang="en-US" smtClean="0"/>
+              <a:t>Fourth level</a:t>
+            </a:r>
+          </a:p>
+          <a:p>
+            <a:pPr lvl="4"/>
+            <a:r>
+              <a:rPr lang="en-US" smtClean="0"/>
+              <a:t>Fifth level</a:t>
+            </a:r>
+            <a:endParaRPr lang="en-US"/>
+          </a:p>
+        </p:txBody>
+      </p:sp>
+      <p:sp>
+        <p:nvSpPr>
+          <p:cNvPr id="6" name="Footer Placeholder 5"/>
+          <p:cNvSpPr>
+            <a:spLocks noGrp="1"/>
+          </p:cNvSpPr>
+          <p:nvPr>
+            <p:ph type="ftr" sz="quarter" idx="4"/>
+          </p:nvPr>
+        </p:nvSpPr>
+        <p:spPr>
+          <a:xfrm>
+            <a:off x="0" y="8685213"/>
+            <a:ext cx="2971800" cy="457200"/>
+          </a:xfrm>
+          <a:prstGeom prst="rect">
+            <a:avLst/>
+          </a:prstGeom>
+        </p:spPr>
+        <p:txBody>
+          <a:bodyPr vert="horz" lIns="91440" tIns="45720" rIns="91440" bIns="45720" rtlCol="0" anchor="b"/>
+          <a:lstStyle>
+            <a:lvl1pPr algn="l">
+              <a:defRPr sz="1200"/>
+            </a:lvl1pPr>
+          </a:lstStyle>
+          <a:p>
+            <a:endParaRPr lang="en-US"/>
+          </a:p>
+        </p:txBody>
+      </p:sp>
+      <p:sp>
+        <p:nvSpPr>
+          <p:cNvPr id="7" name="Slide Number Placeholder 6"/>
+          <p:cNvSpPr>
+            <a:spLocks noGrp="1"/>
+          </p:cNvSpPr>
+          <p:nvPr>
+            <p:ph type="sldNum" sz="quarter" idx="5"/>
+          </p:nvPr>
+        </p:nvSpPr>
+        <p:spPr>
+          <a:xfrm>
+            <a:off x="3884613" y="8685213"/>
+            <a:ext cx="2971800" cy="457200"/>
+          </a:xfrm>
+          <a:prstGeom prst="rect">
+            <a:avLst/>
+          </a:prstGeom>
+        </p:spPr>
+        <p:txBody>
+          <a:bodyPr vert="horz" lIns="91440" tIns="45720" rIns="91440" bIns="45720" rtlCol="0" anchor="b"/>
+          <a:lstStyle>
+            <a:lvl1pPr algn="r">
+              <a:defRPr sz="1200"/>
+            </a:lvl1pPr>
+          </a:lstStyle>
+          <a:p>
+            <a:fld id="{BB5E49A5-4136-284D-997B-48E1D791AD67}" type="slidenum">
+              <a:rPr lang="en-US" smtClean="0"/>
+              <a:t>‹#›</a:t>
+            </a:fld>
+            <a:endParaRPr lang="en-US"/>
+          </a:p>
+        </p:txBody>
+      </p:sp>
+    </p:spTree>
+    <p:extLst>
+      <p:ext uri="{BB962C8B-B14F-4D97-AF65-F5344CB8AC3E}">
+        <p14:creationId xmlns:p14="http://schemas.microsoft.com/office/powerpoint/2010/main" val="2623252185"/>
+      </p:ext>
+    </p:extLst>
+  </p:cSld>
+  <p:clrMap bg1="lt1" tx1="dk1" bg2="lt2" tx2="dk2" accent1="accent1" accent2="accent2" accent3="accent3" accent4="accent4" accent5="accent5" accent6="accent6" hlink="hlink" folHlink="folHlink"/>
+  <p:notesStyle>
+    <a:lvl1pPr marL="0" algn="l" defTabSz="457200" rtl="0" eaLnBrk="1" latinLnBrk="0" hangingPunct="1">
+      <a:defRPr sz="1200" kern="1200">
+        <a:solidFill>
+          <a:schemeClr val="tx1"/>
+        </a:solidFill>
+        <a:latin typeface="+mn-lt"/>
+        <a:ea typeface="+mn-ea"/>
+        <a:cs typeface="+mn-cs"/>
+      </a:defRPr>
+    </a:lvl1pPr>
+    <a:lvl2pPr marL="457200" algn="l" defTabSz="457200" rtl="0" eaLnBrk="1" latinLnBrk="0" hangingPunct="1">
+      <a:defRPr sz="1200" kern="1200">
+        <a:solidFill>
+          <a:schemeClr val="tx1"/>
+        </a:solidFill>
+        <a:latin typeface="+mn-lt"/>
+        <a:ea typeface="+mn-ea"/>
+        <a:cs typeface="+mn-cs"/>
+      </a:defRPr>
+    </a:lvl2pPr>
+    <a:lvl3pPr marL="914400" algn="l" defTabSz="457200" rtl="0" eaLnBrk="1" latinLnBrk="0" hangingPunct="1">
+      <a:defRPr sz="1200" kern="1200">
+        <a:solidFill>
+          <a:schemeClr val="tx1"/>
+        </a:solidFill>
+        <a:latin typeface="+mn-lt"/>
+        <a:ea typeface="+mn-ea"/>
+        <a:cs typeface="+mn-cs"/>
+      </a:defRPr>
+    </a:lvl3pPr>
+    <a:lvl4pPr marL="1371600" algn="l" defTabSz="457200" rtl="0" eaLnBrk="1" latinLnBrk="0" hangingPunct="1">
+      <a:defRPr sz="1200" kern="1200">
+        <a:solidFill>
+          <a:schemeClr val="tx1"/>
+        </a:solidFill>
+        <a:latin typeface="+mn-lt"/>
+        <a:ea typeface="+mn-ea"/>
+        <a:cs typeface="+mn-cs"/>
+      </a:defRPr>
+    </a:lvl4pPr>
+    <a:lvl5pPr marL="1828800" algn="l" defTabSz="457200" rtl="0" eaLnBrk="1" latinLnBrk="0" hangingPunct="1">
+      <a:defRPr sz="1200" kern="1200">
+        <a:solidFill>
+          <a:schemeClr val="tx1"/>
+        </a:solidFill>
+        <a:latin typeface="+mn-lt"/>
+        <a:ea typeface="+mn-ea"/>
+        <a:cs typeface="+mn-cs"/>
+      </a:defRPr>
+    </a:lvl5pPr>
+    <a:lvl6pPr marL="2286000" algn="l" defTabSz="457200" rtl="0" eaLnBrk="1" latinLnBrk="0" hangingPunct="1">
+      <a:defRPr sz="1200" kern="1200">
+        <a:solidFill>
+          <a:schemeClr val="tx1"/>
+        </a:solidFill>
+        <a:latin typeface="+mn-lt"/>
+        <a:ea typeface="+mn-ea"/>
+        <a:cs typeface="+mn-cs"/>
+      </a:defRPr>
+    </a:lvl6pPr>
+    <a:lvl7pPr marL="2743200" algn="l" defTabSz="457200" rtl="0" eaLnBrk="1" latinLnBrk="0" hangingPunct="1">
+      <a:defRPr sz="1200" kern="1200">
+        <a:solidFill>
+          <a:schemeClr val="tx1"/>
+        </a:solidFill>
+        <a:latin typeface="+mn-lt"/>
+        <a:ea typeface="+mn-ea"/>
+        <a:cs typeface="+mn-cs"/>
+      </a:defRPr>
+    </a:lvl7pPr>
+    <a:lvl8pPr marL="3200400" algn="l" defTabSz="457200" rtl="0" eaLnBrk="1" latinLnBrk="0" hangingPunct="1">
+      <a:defRPr sz="1200" kern="1200">
+        <a:solidFill>
+          <a:schemeClr val="tx1"/>
+        </a:solidFill>
+        <a:latin typeface="+mn-lt"/>
+        <a:ea typeface="+mn-ea"/>
+        <a:cs typeface="+mn-cs"/>
+      </a:defRPr>
+    </a:lvl8pPr>
+    <a:lvl9pPr marL="3657600" algn="l" defTabSz="457200" rtl="0" eaLnBrk="1" latinLnBrk="0" hangingPunct="1">
+      <a:defRPr sz="1200" kern="1200">
+        <a:solidFill>
+          <a:schemeClr val="tx1"/>
+        </a:solidFill>
+        <a:latin typeface="+mn-lt"/>
+        <a:ea typeface="+mn-ea"/>
+        <a:cs typeface="+mn-cs"/>
+      </a:defRPr>
+    </a:lvl9pPr>
+  </p:notesStyle>
+</p:notesMaster>
+</file>
+
+<file path=ppt/notesSlides/notesSlide1.xml><?xml version="1.0" encoding="utf-8"?>
+<p:notes xmlns:a="http://schemas.openxmlformats.org/drawingml/2006/main" xmlns:p="http://schemas.openxmlformats.org/presentationml/2006/main" xmlns:r="http://schemas.openxmlformats.org/officeDocument/2006/relationships">
+  <p:cSld>
+    <p:spTree>
+      <p:nvGrpSpPr>
+        <p:cNvPr id="1" name=""/>
+        <p:cNvGrpSpPr/>
+        <p:nvPr/>
+      </p:nvGrpSpPr>
+      <p:grpSpPr>
+        <a:xfrm>
+          <a:off x="0" y="0"/>
+          <a:ext cx="0" cy="0"/>
+          <a:chOff x="0" y="0"/>
+          <a:chExt cx="0" cy="0"/>
+        </a:xfrm>
+      </p:grpSpPr>
+      <p:sp>
+        <p:nvSpPr>
+          <p:cNvPr id="2" name="Slide Image Placeholder 1"/>
+          <p:cNvSpPr>
+            <a:spLocks noGrp="1"/>
+          </p:cNvSpPr>
+          <p:nvPr>
+            <p:ph type="sldImg" idx="2"/>
+          </p:nvPr>
+        </p:nvSpPr>
+        <p:spPr/>
+      </p:sp>
+      <p:sp>
+        <p:nvSpPr>
+          <p:cNvPr id="3" name="Notes Placeholder 2"/>
+          <p:cNvSpPr>
+            <a:spLocks noGrp="1"/>
+          </p:cNvSpPr>
+          <p:nvPr>
+            <p:ph type="body" idx="3" sz="quarter"/>
+          </p:nvPr>
+        </p:nvSpPr>
+        <p:spPr/>
+        <p:txBody>
+          <a:bodyPr/>
+          <a:lstStyle/>
+          <a:p>
+            <a:r>
+              <a:t>各位老师好，我汇报的题目是《基于深度学习的阿尔茨海默症患者与健康人群肠道微生物组中抗菌肽的差异性研究》。本次中期检查按导师意见，重点汇报研究思路与各项工作的完成程度。</a:t>
+            </a:r>
+          </a:p>
+        </p:txBody>
+      </p:sp>
+      <p:sp>
+        <p:nvSpPr>
+          <p:cNvPr id="4" name="Slide Number Placeholder 3"/>
+          <p:cNvSpPr>
+            <a:spLocks noGrp="1"/>
+          </p:cNvSpPr>
+          <p:nvPr>
+            <p:ph type="sldNum" idx="5" sz="quarter"/>
+          </p:nvPr>
+        </p:nvSpPr>
+        <p:spPr/>
+      </p:sp>
+    </p:spTree>
+  </p:cSld>
+  <p:clrMapOvr>
+    <a:masterClrMapping/>
+  </p:clrMapOvr>
+</p:notes>
+</file>
+
+<file path=ppt/notesSlides/notesSlide10.xml><?xml version="1.0" encoding="utf-8"?>
+<p:notes xmlns:a="http://schemas.openxmlformats.org/drawingml/2006/main" xmlns:p="http://schemas.openxmlformats.org/presentationml/2006/main" xmlns:r="http://schemas.openxmlformats.org/officeDocument/2006/relationships">
+  <p:cSld>
+    <p:spTree>
+      <p:nvGrpSpPr>
+        <p:cNvPr id="1" name=""/>
+        <p:cNvGrpSpPr/>
+        <p:nvPr/>
+      </p:nvGrpSpPr>
+      <p:grpSpPr>
+        <a:xfrm>
+          <a:off x="0" y="0"/>
+          <a:ext cx="0" cy="0"/>
+          <a:chOff x="0" y="0"/>
+          <a:chExt cx="0" cy="0"/>
+        </a:xfrm>
+      </p:grpSpPr>
+      <p:sp>
+        <p:nvSpPr>
+          <p:cNvPr id="2" name="Slide Image Placeholder 1"/>
+          <p:cNvSpPr>
+            <a:spLocks noGrp="1"/>
+          </p:cNvSpPr>
+          <p:nvPr>
+            <p:ph type="sldImg" idx="2"/>
+          </p:nvPr>
+        </p:nvSpPr>
+        <p:spPr/>
+      </p:sp>
+      <p:sp>
+        <p:nvSpPr>
+          <p:cNvPr id="3" name="Notes Placeholder 2"/>
+          <p:cNvSpPr>
+            <a:spLocks noGrp="1"/>
+          </p:cNvSpPr>
+          <p:nvPr>
+            <p:ph type="body" idx="3" sz="quarter"/>
+          </p:nvPr>
+        </p:nvSpPr>
+        <p:spPr/>
+        <p:txBody>
+          <a:bodyPr/>
+          <a:lstStyle/>
+          <a:p>
+            <a:r>
+              <a:t>最后是抑菌实验验证，方案刻意做得很简单：选少量有代表性的候选肽送合成，用常见指示菌做纸片扩散法初筛，再用微量肉汤稀释法测最低抑菌浓度，同时设置阳性与阴性对照。常规微生物实验室即可完成。</a:t>
+            </a:r>
+          </a:p>
+        </p:txBody>
+      </p:sp>
+      <p:sp>
+        <p:nvSpPr>
+          <p:cNvPr id="4" name="Slide Number Placeholder 3"/>
+          <p:cNvSpPr>
+            <a:spLocks noGrp="1"/>
+          </p:cNvSpPr>
+          <p:nvPr>
+            <p:ph type="sldNum" idx="5" sz="quarter"/>
+          </p:nvPr>
+        </p:nvSpPr>
+        <p:spPr/>
+      </p:sp>
+    </p:spTree>
+  </p:cSld>
+  <p:clrMapOvr>
+    <a:masterClrMapping/>
+  </p:clrMapOvr>
+</p:notes>
+</file>
+
+<file path=ppt/notesSlides/notesSlide11.xml><?xml version="1.0" encoding="utf-8"?>
+<p:notes xmlns:a="http://schemas.openxmlformats.org/drawingml/2006/main" xmlns:p="http://schemas.openxmlformats.org/presentationml/2006/main" xmlns:r="http://schemas.openxmlformats.org/officeDocument/2006/relationships">
+  <p:cSld>
+    <p:spTree>
+      <p:nvGrpSpPr>
+        <p:cNvPr id="1" name=""/>
+        <p:cNvGrpSpPr/>
+        <p:nvPr/>
+      </p:nvGrpSpPr>
+      <p:grpSpPr>
+        <a:xfrm>
+          <a:off x="0" y="0"/>
+          <a:ext cx="0" cy="0"/>
+          <a:chOff x="0" y="0"/>
+          <a:chExt cx="0" cy="0"/>
+        </a:xfrm>
+      </p:grpSpPr>
+      <p:sp>
+        <p:nvSpPr>
+          <p:cNvPr id="2" name="Slide Image Placeholder 1"/>
+          <p:cNvSpPr>
+            <a:spLocks noGrp="1"/>
+          </p:cNvSpPr>
+          <p:nvPr>
+            <p:ph type="sldImg" idx="2"/>
+          </p:nvPr>
+        </p:nvSpPr>
+        <p:spPr/>
+      </p:sp>
+      <p:sp>
+        <p:nvSpPr>
+          <p:cNvPr id="3" name="Notes Placeholder 2"/>
+          <p:cNvSpPr>
+            <a:spLocks noGrp="1"/>
+          </p:cNvSpPr>
+          <p:nvPr>
+            <p:ph type="body" idx="3" sz="quarter"/>
+          </p:nvPr>
+        </p:nvSpPr>
+        <p:spPr/>
+        <p:txBody>
+          <a:bodyPr/>
+          <a:lstStyle/>
+          <a:p>
+            <a:r>
+              <a:t>从进度上看，前五项任务已经全部完成，目前集中在机制关联分析与抑菌实验验证两件事上，论文撰写同步推进，整体进度与开题安排一致。</a:t>
+            </a:r>
+          </a:p>
+        </p:txBody>
+      </p:sp>
+      <p:sp>
+        <p:nvSpPr>
+          <p:cNvPr id="4" name="Slide Number Placeholder 3"/>
+          <p:cNvSpPr>
+            <a:spLocks noGrp="1"/>
+          </p:cNvSpPr>
+          <p:nvPr>
+            <p:ph type="sldNum" idx="5" sz="quarter"/>
+          </p:nvPr>
+        </p:nvSpPr>
+        <p:spPr/>
+      </p:sp>
+    </p:spTree>
+  </p:cSld>
+  <p:clrMapOvr>
+    <a:masterClrMapping/>
+  </p:clrMapOvr>
+</p:notes>
+</file>
+
+<file path=ppt/notesSlides/notesSlide12.xml><?xml version="1.0" encoding="utf-8"?>
+<p:notes xmlns:a="http://schemas.openxmlformats.org/drawingml/2006/main" xmlns:p="http://schemas.openxmlformats.org/presentationml/2006/main" xmlns:r="http://schemas.openxmlformats.org/officeDocument/2006/relationships">
+  <p:cSld>
+    <p:spTree>
+      <p:nvGrpSpPr>
+        <p:cNvPr id="1" name=""/>
+        <p:cNvGrpSpPr/>
+        <p:nvPr/>
+      </p:nvGrpSpPr>
+      <p:grpSpPr>
+        <a:xfrm>
+          <a:off x="0" y="0"/>
+          <a:ext cx="0" cy="0"/>
+          <a:chOff x="0" y="0"/>
+          <a:chExt cx="0" cy="0"/>
+        </a:xfrm>
+      </p:grpSpPr>
+      <p:sp>
+        <p:nvSpPr>
+          <p:cNvPr id="2" name="Slide Image Placeholder 1"/>
+          <p:cNvSpPr>
+            <a:spLocks noGrp="1"/>
+          </p:cNvSpPr>
+          <p:nvPr>
+            <p:ph type="sldImg" idx="2"/>
+          </p:nvPr>
+        </p:nvSpPr>
+        <p:spPr/>
+      </p:sp>
+      <p:sp>
+        <p:nvSpPr>
+          <p:cNvPr id="3" name="Notes Placeholder 2"/>
+          <p:cNvSpPr>
+            <a:spLocks noGrp="1"/>
+          </p:cNvSpPr>
+          <p:nvPr>
+            <p:ph type="body" idx="3" sz="quarter"/>
+          </p:nvPr>
+        </p:nvSpPr>
+        <p:spPr/>
+        <p:txBody>
+          <a:bodyPr/>
+          <a:lstStyle/>
+          <a:p>
+            <a:r>
+              <a:t>后续收尾分四块：机制关联分析、抑菌实验验证、结果整理，以及论文撰写与预答辩准备。这些工作不再涉及大规模数据生产。</a:t>
+            </a:r>
+          </a:p>
+        </p:txBody>
+      </p:sp>
+      <p:sp>
+        <p:nvSpPr>
+          <p:cNvPr id="4" name="Slide Number Placeholder 3"/>
+          <p:cNvSpPr>
+            <a:spLocks noGrp="1"/>
+          </p:cNvSpPr>
+          <p:nvPr>
+            <p:ph type="sldNum" idx="5" sz="quarter"/>
+          </p:nvPr>
+        </p:nvSpPr>
+        <p:spPr/>
+      </p:sp>
+    </p:spTree>
+  </p:cSld>
+  <p:clrMapOvr>
+    <a:masterClrMapping/>
+  </p:clrMapOvr>
+</p:notes>
+</file>
+
+<file path=ppt/notesSlides/notesSlide13.xml><?xml version="1.0" encoding="utf-8"?>
+<p:notes xmlns:a="http://schemas.openxmlformats.org/drawingml/2006/main" xmlns:p="http://schemas.openxmlformats.org/presentationml/2006/main" xmlns:r="http://schemas.openxmlformats.org/officeDocument/2006/relationships">
+  <p:cSld>
+    <p:spTree>
+      <p:nvGrpSpPr>
+        <p:cNvPr id="1" name=""/>
+        <p:cNvGrpSpPr/>
+        <p:nvPr/>
+      </p:nvGrpSpPr>
+      <p:grpSpPr>
+        <a:xfrm>
+          <a:off x="0" y="0"/>
+          <a:ext cx="0" cy="0"/>
+          <a:chOff x="0" y="0"/>
+          <a:chExt cx="0" cy="0"/>
+        </a:xfrm>
+      </p:grpSpPr>
+      <p:sp>
+        <p:nvSpPr>
+          <p:cNvPr id="2" name="Slide Image Placeholder 1"/>
+          <p:cNvSpPr>
+            <a:spLocks noGrp="1"/>
+          </p:cNvSpPr>
+          <p:nvPr>
+            <p:ph type="sldImg" idx="2"/>
+          </p:nvPr>
+        </p:nvSpPr>
+        <p:spPr/>
+      </p:sp>
+      <p:sp>
+        <p:nvSpPr>
+          <p:cNvPr id="3" name="Notes Placeholder 2"/>
+          <p:cNvSpPr>
+            <a:spLocks noGrp="1"/>
+          </p:cNvSpPr>
+          <p:nvPr>
+            <p:ph type="body" idx="3" sz="quarter"/>
+          </p:nvPr>
+        </p:nvSpPr>
+        <p:spPr/>
+        <p:txBody>
+          <a:bodyPr/>
+          <a:lstStyle/>
+          <a:p>
+            <a:r>
+              <a:t>与开题计划对照：数据准备、候选肽挖掘、差异分析都已按计划完成，差异分析还增加了宏蛋白组去重；模型方案由自建模型调整为三个已发表模型协同预测；机制与验证部分即将开展。</a:t>
+            </a:r>
+          </a:p>
+        </p:txBody>
+      </p:sp>
+      <p:sp>
+        <p:nvSpPr>
+          <p:cNvPr id="4" name="Slide Number Placeholder 3"/>
+          <p:cNvSpPr>
+            <a:spLocks noGrp="1"/>
+          </p:cNvSpPr>
+          <p:nvPr>
+            <p:ph type="sldNum" idx="5" sz="quarter"/>
+          </p:nvPr>
+        </p:nvSpPr>
+        <p:spPr/>
+      </p:sp>
+    </p:spTree>
+  </p:cSld>
+  <p:clrMapOvr>
+    <a:masterClrMapping/>
+  </p:clrMapOvr>
+</p:notes>
+</file>
+
+<file path=ppt/notesSlides/notesSlide14.xml><?xml version="1.0" encoding="utf-8"?>
+<p:notes xmlns:a="http://schemas.openxmlformats.org/drawingml/2006/main" xmlns:p="http://schemas.openxmlformats.org/presentationml/2006/main" xmlns:r="http://schemas.openxmlformats.org/officeDocument/2006/relationships">
+  <p:cSld>
+    <p:spTree>
+      <p:nvGrpSpPr>
+        <p:cNvPr id="1" name=""/>
+        <p:cNvGrpSpPr/>
+        <p:nvPr/>
+      </p:nvGrpSpPr>
+      <p:grpSpPr>
+        <a:xfrm>
+          <a:off x="0" y="0"/>
+          <a:ext cx="0" cy="0"/>
+          <a:chOff x="0" y="0"/>
+          <a:chExt cx="0" cy="0"/>
+        </a:xfrm>
+      </p:grpSpPr>
+      <p:sp>
+        <p:nvSpPr>
+          <p:cNvPr id="2" name="Slide Image Placeholder 1"/>
+          <p:cNvSpPr>
+            <a:spLocks noGrp="1"/>
+          </p:cNvSpPr>
+          <p:nvPr>
+            <p:ph type="sldImg" idx="2"/>
+          </p:nvPr>
+        </p:nvSpPr>
+        <p:spPr/>
+      </p:sp>
+      <p:sp>
+        <p:nvSpPr>
+          <p:cNvPr id="3" name="Notes Placeholder 2"/>
+          <p:cNvSpPr>
+            <a:spLocks noGrp="1"/>
+          </p:cNvSpPr>
+          <p:nvPr>
+            <p:ph type="body" idx="3" sz="quarter"/>
+          </p:nvPr>
+        </p:nvSpPr>
+        <p:spPr/>
+        <p:txBody>
+          <a:bodyPr/>
+          <a:lstStyle/>
+          <a:p>
+            <a:r>
+              <a:t>目前存在的问题有三点：预测的假阳性风险、部分样本缺少参考基因组、机制关联的证据强度有限，各自都有对应的处理办法，不影响整体进度。</a:t>
+            </a:r>
+          </a:p>
+        </p:txBody>
+      </p:sp>
+      <p:sp>
+        <p:nvSpPr>
+          <p:cNvPr id="4" name="Slide Number Placeholder 3"/>
+          <p:cNvSpPr>
+            <a:spLocks noGrp="1"/>
+          </p:cNvSpPr>
+          <p:nvPr>
+            <p:ph type="sldNum" idx="5" sz="quarter"/>
+          </p:nvPr>
+        </p:nvSpPr>
+        <p:spPr/>
+      </p:sp>
+    </p:spTree>
+  </p:cSld>
+  <p:clrMapOvr>
+    <a:masterClrMapping/>
+  </p:clrMapOvr>
+</p:notes>
+</file>
+
+<file path=ppt/notesSlides/notesSlide15.xml><?xml version="1.0" encoding="utf-8"?>
+<p:notes xmlns:a="http://schemas.openxmlformats.org/drawingml/2006/main" xmlns:p="http://schemas.openxmlformats.org/presentationml/2006/main" xmlns:r="http://schemas.openxmlformats.org/officeDocument/2006/relationships">
+  <p:cSld>
+    <p:spTree>
+      <p:nvGrpSpPr>
+        <p:cNvPr id="1" name=""/>
+        <p:cNvGrpSpPr/>
+        <p:nvPr/>
+      </p:nvGrpSpPr>
+      <p:grpSpPr>
+        <a:xfrm>
+          <a:off x="0" y="0"/>
+          <a:ext cx="0" cy="0"/>
+          <a:chOff x="0" y="0"/>
+          <a:chExt cx="0" cy="0"/>
+        </a:xfrm>
+      </p:grpSpPr>
+      <p:sp>
+        <p:nvSpPr>
+          <p:cNvPr id="2" name="Slide Image Placeholder 1"/>
+          <p:cNvSpPr>
+            <a:spLocks noGrp="1"/>
+          </p:cNvSpPr>
+          <p:nvPr>
+            <p:ph type="sldImg" idx="2"/>
+          </p:nvPr>
+        </p:nvSpPr>
+        <p:spPr/>
+      </p:sp>
+      <p:sp>
+        <p:nvSpPr>
+          <p:cNvPr id="3" name="Notes Placeholder 2"/>
+          <p:cNvSpPr>
+            <a:spLocks noGrp="1"/>
+          </p:cNvSpPr>
+          <p:nvPr>
+            <p:ph type="body" idx="3" sz="quarter"/>
+          </p:nvPr>
+        </p:nvSpPr>
+        <p:spPr/>
+        <p:txBody>
+          <a:bodyPr/>
+          <a:lstStyle/>
+          <a:p>
+            <a:r>
+              <a:t>预期成果包括：一套可复用的分析流程、健康人与各阶段特有的候选抗菌肽清单、机制关联的分析结果、抑菌活性的初步证据，以及一篇投稿论文与学位论文。</a:t>
+            </a:r>
+          </a:p>
+        </p:txBody>
+      </p:sp>
+      <p:sp>
+        <p:nvSpPr>
+          <p:cNvPr id="4" name="Slide Number Placeholder 3"/>
+          <p:cNvSpPr>
+            <a:spLocks noGrp="1"/>
+          </p:cNvSpPr>
+          <p:nvPr>
+            <p:ph type="sldNum" idx="5" sz="quarter"/>
+          </p:nvPr>
+        </p:nvSpPr>
+        <p:spPr/>
+      </p:sp>
+    </p:spTree>
+  </p:cSld>
+  <p:clrMapOvr>
+    <a:masterClrMapping/>
+  </p:clrMapOvr>
+</p:notes>
+</file>
+
+<file path=ppt/notesSlides/notesSlide16.xml><?xml version="1.0" encoding="utf-8"?>
+<p:notes xmlns:a="http://schemas.openxmlformats.org/drawingml/2006/main" xmlns:p="http://schemas.openxmlformats.org/presentationml/2006/main" xmlns:r="http://schemas.openxmlformats.org/officeDocument/2006/relationships">
+  <p:cSld>
+    <p:spTree>
+      <p:nvGrpSpPr>
+        <p:cNvPr id="1" name=""/>
+        <p:cNvGrpSpPr/>
+        <p:nvPr/>
+      </p:nvGrpSpPr>
+      <p:grpSpPr>
+        <a:xfrm>
+          <a:off x="0" y="0"/>
+          <a:ext cx="0" cy="0"/>
+          <a:chOff x="0" y="0"/>
+          <a:chExt cx="0" cy="0"/>
+        </a:xfrm>
+      </p:grpSpPr>
+      <p:sp>
+        <p:nvSpPr>
+          <p:cNvPr id="2" name="Slide Image Placeholder 1"/>
+          <p:cNvSpPr>
+            <a:spLocks noGrp="1"/>
+          </p:cNvSpPr>
+          <p:nvPr>
+            <p:ph type="sldImg" idx="2"/>
+          </p:nvPr>
+        </p:nvSpPr>
+        <p:spPr/>
+      </p:sp>
+      <p:sp>
+        <p:nvSpPr>
+          <p:cNvPr id="3" name="Notes Placeholder 2"/>
+          <p:cNvSpPr>
+            <a:spLocks noGrp="1"/>
+          </p:cNvSpPr>
+          <p:nvPr>
+            <p:ph type="body" idx="3" sz="quarter"/>
+          </p:nvPr>
+        </p:nvSpPr>
+        <p:spPr/>
+        <p:txBody>
+          <a:bodyPr/>
+          <a:lstStyle/>
+          <a:p>
+            <a:r>
+              <a:t>我的汇报到此结束，恳请各位老师批评指正，谢谢！</a:t>
+            </a:r>
+          </a:p>
+        </p:txBody>
+      </p:sp>
+      <p:sp>
+        <p:nvSpPr>
+          <p:cNvPr id="4" name="Slide Number Placeholder 3"/>
+          <p:cNvSpPr>
+            <a:spLocks noGrp="1"/>
+          </p:cNvSpPr>
+          <p:nvPr>
+            <p:ph type="sldNum" idx="5" sz="quarter"/>
+          </p:nvPr>
+        </p:nvSpPr>
+        <p:spPr/>
+      </p:sp>
+    </p:spTree>
+  </p:cSld>
+  <p:clrMapOvr>
+    <a:masterClrMapping/>
+  </p:clrMapOvr>
+</p:notes>
+</file>
+
+<file path=ppt/notesSlides/notesSlide2.xml><?xml version="1.0" encoding="utf-8"?>
+<p:notes xmlns:a="http://schemas.openxmlformats.org/drawingml/2006/main" xmlns:p="http://schemas.openxmlformats.org/presentationml/2006/main" xmlns:r="http://schemas.openxmlformats.org/officeDocument/2006/relationships">
+  <p:cSld>
+    <p:spTree>
+      <p:nvGrpSpPr>
+        <p:cNvPr id="1" name=""/>
+        <p:cNvGrpSpPr/>
+        <p:nvPr/>
+      </p:nvGrpSpPr>
+      <p:grpSpPr>
+        <a:xfrm>
+          <a:off x="0" y="0"/>
+          <a:ext cx="0" cy="0"/>
+          <a:chOff x="0" y="0"/>
+          <a:chExt cx="0" cy="0"/>
+        </a:xfrm>
+      </p:grpSpPr>
+      <p:sp>
+        <p:nvSpPr>
+          <p:cNvPr id="2" name="Slide Image Placeholder 1"/>
+          <p:cNvSpPr>
+            <a:spLocks noGrp="1"/>
+          </p:cNvSpPr>
+          <p:nvPr>
+            <p:ph type="sldImg" idx="2"/>
+          </p:nvPr>
+        </p:nvSpPr>
+        <p:spPr/>
+      </p:sp>
+      <p:sp>
+        <p:nvSpPr>
+          <p:cNvPr id="3" name="Notes Placeholder 2"/>
+          <p:cNvSpPr>
+            <a:spLocks noGrp="1"/>
+          </p:cNvSpPr>
+          <p:nvPr>
+            <p:ph type="body" idx="3" sz="quarter"/>
+          </p:nvPr>
+        </p:nvSpPr>
+        <p:spPr/>
+        <p:txBody>
+          <a:bodyPr/>
+          <a:lstStyle/>
+          <a:p>
+            <a:r>
+              <a:t>汇报分六部分：先说整体思路，再依次说明已完成的数据与预测工作、差异分析与去重工作，然后是下一步的机制关联与抑菌实验，最后是进度与安排。</a:t>
+            </a:r>
+          </a:p>
+        </p:txBody>
+      </p:sp>
+      <p:sp>
+        <p:nvSpPr>
+          <p:cNvPr id="4" name="Slide Number Placeholder 3"/>
+          <p:cNvSpPr>
+            <a:spLocks noGrp="1"/>
+          </p:cNvSpPr>
+          <p:nvPr>
+            <p:ph type="sldNum" idx="5" sz="quarter"/>
+          </p:nvPr>
+        </p:nvSpPr>
+        <p:spPr/>
+      </p:sp>
+    </p:spTree>
+  </p:cSld>
+  <p:clrMapOvr>
+    <a:masterClrMapping/>
+  </p:clrMapOvr>
+</p:notes>
+</file>
+
+<file path=ppt/notesSlides/notesSlide3.xml><?xml version="1.0" encoding="utf-8"?>
+<p:notes xmlns:a="http://schemas.openxmlformats.org/drawingml/2006/main" xmlns:p="http://schemas.openxmlformats.org/presentationml/2006/main" xmlns:r="http://schemas.openxmlformats.org/officeDocument/2006/relationships">
+  <p:cSld>
+    <p:spTree>
+      <p:nvGrpSpPr>
+        <p:cNvPr id="1" name=""/>
+        <p:cNvGrpSpPr/>
+        <p:nvPr/>
+      </p:nvGrpSpPr>
+      <p:grpSpPr>
+        <a:xfrm>
+          <a:off x="0" y="0"/>
+          <a:ext cx="0" cy="0"/>
+          <a:chOff x="0" y="0"/>
+          <a:chExt cx="0" cy="0"/>
+        </a:xfrm>
+      </p:grpSpPr>
+      <p:sp>
+        <p:nvSpPr>
+          <p:cNvPr id="2" name="Slide Image Placeholder 1"/>
+          <p:cNvSpPr>
+            <a:spLocks noGrp="1"/>
+          </p:cNvSpPr>
+          <p:nvPr>
+            <p:ph type="sldImg" idx="2"/>
+          </p:nvPr>
+        </p:nvSpPr>
+        <p:spPr/>
+      </p:sp>
+      <p:sp>
+        <p:nvSpPr>
+          <p:cNvPr id="3" name="Notes Placeholder 2"/>
+          <p:cNvSpPr>
+            <a:spLocks noGrp="1"/>
+          </p:cNvSpPr>
+          <p:nvPr>
+            <p:ph type="body" idx="3" sz="quarter"/>
+          </p:nvPr>
+        </p:nvSpPr>
+        <p:spPr/>
+        <p:txBody>
+          <a:bodyPr/>
+          <a:lstStyle/>
+          <a:p>
+            <a:r>
+              <a:t>整个研究可以概括为八步：前四步是宏基因组数据、参考集、短肽库和三模型预测，属于数据与预测阶段；后四步是分阶段差异分析、宏蛋白组去重、特有抗菌肽筛选以及机制关联与验证。目前数据与预测阶段已全部完成，分阶段差异分析与宏蛋白组去重也已基本完成，工作重心转到特有抗菌肽的机制关联与极简抑菌实验验证。</a:t>
+            </a:r>
+          </a:p>
+        </p:txBody>
+      </p:sp>
+      <p:sp>
+        <p:nvSpPr>
+          <p:cNvPr id="4" name="Slide Number Placeholder 3"/>
+          <p:cNvSpPr>
+            <a:spLocks noGrp="1"/>
+          </p:cNvSpPr>
+          <p:nvPr>
+            <p:ph type="sldNum" idx="5" sz="quarter"/>
+          </p:nvPr>
+        </p:nvSpPr>
+        <p:spPr/>
+      </p:sp>
+    </p:spTree>
+  </p:cSld>
+  <p:clrMapOvr>
+    <a:masterClrMapping/>
+  </p:clrMapOvr>
+</p:notes>
+</file>
+
+<file path=ppt/notesSlides/notesSlide4.xml><?xml version="1.0" encoding="utf-8"?>
+<p:notes xmlns:a="http://schemas.openxmlformats.org/drawingml/2006/main" xmlns:p="http://schemas.openxmlformats.org/presentationml/2006/main" xmlns:r="http://schemas.openxmlformats.org/officeDocument/2006/relationships">
+  <p:cSld>
+    <p:spTree>
+      <p:nvGrpSpPr>
+        <p:cNvPr id="1" name=""/>
+        <p:cNvGrpSpPr/>
+        <p:nvPr/>
+      </p:nvGrpSpPr>
+      <p:grpSpPr>
+        <a:xfrm>
+          <a:off x="0" y="0"/>
+          <a:ext cx="0" cy="0"/>
+          <a:chOff x="0" y="0"/>
+          <a:chExt cx="0" cy="0"/>
+        </a:xfrm>
+      </p:grpSpPr>
+      <p:sp>
+        <p:nvSpPr>
+          <p:cNvPr id="2" name="Slide Image Placeholder 1"/>
+          <p:cNvSpPr>
+            <a:spLocks noGrp="1"/>
+          </p:cNvSpPr>
+          <p:nvPr>
+            <p:ph type="sldImg" idx="2"/>
+          </p:nvPr>
+        </p:nvSpPr>
+        <p:spPr/>
+      </p:sp>
+      <p:sp>
+        <p:nvSpPr>
+          <p:cNvPr id="3" name="Notes Placeholder 2"/>
+          <p:cNvSpPr>
+            <a:spLocks noGrp="1"/>
+          </p:cNvSpPr>
+          <p:nvPr>
+            <p:ph type="body" idx="3" sz="quarter"/>
+          </p:nvPr>
+        </p:nvSpPr>
+        <p:spPr/>
+        <p:txBody>
+          <a:bodyPr/>
+          <a:lstStyle/>
+          <a:p>
+            <a:r>
+              <a:t>研究背景有三点：一是 AD 与肠—脑轴的关联已被广泛报道；二是微生物基因组编码的短肽中可能包含抗菌肽，是潜在效应分子；三是现有研究缺少面向 AD 人群、按认知阶段分层的分析。由此提出科学问题。</a:t>
+            </a:r>
+          </a:p>
+        </p:txBody>
+      </p:sp>
+      <p:sp>
+        <p:nvSpPr>
+          <p:cNvPr id="4" name="Slide Number Placeholder 3"/>
+          <p:cNvSpPr>
+            <a:spLocks noGrp="1"/>
+          </p:cNvSpPr>
+          <p:nvPr>
+            <p:ph type="sldNum" idx="5" sz="quarter"/>
+          </p:nvPr>
+        </p:nvSpPr>
+        <p:spPr/>
+      </p:sp>
+    </p:spTree>
+  </p:cSld>
+  <p:clrMapOvr>
+    <a:masterClrMapping/>
+  </p:clrMapOvr>
+</p:notes>
+</file>
+
+<file path=ppt/notesSlides/notesSlide5.xml><?xml version="1.0" encoding="utf-8"?>
+<p:notes xmlns:a="http://schemas.openxmlformats.org/drawingml/2006/main" xmlns:p="http://schemas.openxmlformats.org/presentationml/2006/main" xmlns:r="http://schemas.openxmlformats.org/officeDocument/2006/relationships">
+  <p:cSld>
+    <p:spTree>
+      <p:nvGrpSpPr>
+        <p:cNvPr id="1" name=""/>
+        <p:cNvGrpSpPr/>
+        <p:nvPr/>
+      </p:nvGrpSpPr>
+      <p:grpSpPr>
+        <a:xfrm>
+          <a:off x="0" y="0"/>
+          <a:ext cx="0" cy="0"/>
+          <a:chOff x="0" y="0"/>
+          <a:chExt cx="0" cy="0"/>
+        </a:xfrm>
+      </p:grpSpPr>
+      <p:sp>
+        <p:nvSpPr>
+          <p:cNvPr id="2" name="Slide Image Placeholder 1"/>
+          <p:cNvSpPr>
+            <a:spLocks noGrp="1"/>
+          </p:cNvSpPr>
+          <p:nvPr>
+            <p:ph type="sldImg" idx="2"/>
+          </p:nvPr>
+        </p:nvSpPr>
+        <p:spPr/>
+      </p:sp>
+      <p:sp>
+        <p:nvSpPr>
+          <p:cNvPr id="3" name="Notes Placeholder 2"/>
+          <p:cNvSpPr>
+            <a:spLocks noGrp="1"/>
+          </p:cNvSpPr>
+          <p:nvPr>
+            <p:ph type="body" idx="3" sz="quarter"/>
+          </p:nvPr>
+        </p:nvSpPr>
+        <p:spPr/>
+        <p:txBody>
+          <a:bodyPr/>
+          <a:lstStyle/>
+          <a:p>
+            <a:r>
+              <a:t>第一步与第二步已经完成：全队列的宏基因组数据完成了统一处理，得到微生物基因组参考集，并据此完成短开放阅读框预测，构建了覆盖全队列、可追溯的非冗余短肽库。</a:t>
+            </a:r>
+          </a:p>
+        </p:txBody>
+      </p:sp>
+      <p:sp>
+        <p:nvSpPr>
+          <p:cNvPr id="4" name="Slide Number Placeholder 3"/>
+          <p:cNvSpPr>
+            <a:spLocks noGrp="1"/>
+          </p:cNvSpPr>
+          <p:nvPr>
+            <p:ph type="sldNum" idx="5" sz="quarter"/>
+          </p:nvPr>
+        </p:nvSpPr>
+        <p:spPr/>
+      </p:sp>
+    </p:spTree>
+  </p:cSld>
+  <p:clrMapOvr>
+    <a:masterClrMapping/>
+  </p:clrMapOvr>
+</p:notes>
+</file>
+
+<file path=ppt/notesSlides/notesSlide6.xml><?xml version="1.0" encoding="utf-8"?>
+<p:notes xmlns:a="http://schemas.openxmlformats.org/drawingml/2006/main" xmlns:p="http://schemas.openxmlformats.org/presentationml/2006/main" xmlns:r="http://schemas.openxmlformats.org/officeDocument/2006/relationships">
+  <p:cSld>
+    <p:spTree>
+      <p:nvGrpSpPr>
+        <p:cNvPr id="1" name=""/>
+        <p:cNvGrpSpPr/>
+        <p:nvPr/>
+      </p:nvGrpSpPr>
+      <p:grpSpPr>
+        <a:xfrm>
+          <a:off x="0" y="0"/>
+          <a:ext cx="0" cy="0"/>
+          <a:chOff x="0" y="0"/>
+          <a:chExt cx="0" cy="0"/>
+        </a:xfrm>
+      </p:grpSpPr>
+      <p:sp>
+        <p:nvSpPr>
+          <p:cNvPr id="2" name="Slide Image Placeholder 1"/>
+          <p:cNvSpPr>
+            <a:spLocks noGrp="1"/>
+          </p:cNvSpPr>
+          <p:nvPr>
+            <p:ph type="sldImg" idx="2"/>
+          </p:nvPr>
+        </p:nvSpPr>
+        <p:spPr/>
+      </p:sp>
+      <p:sp>
+        <p:nvSpPr>
+          <p:cNvPr id="3" name="Notes Placeholder 2"/>
+          <p:cNvSpPr>
+            <a:spLocks noGrp="1"/>
+          </p:cNvSpPr>
+          <p:nvPr>
+            <p:ph type="body" idx="3" sz="quarter"/>
+          </p:nvPr>
+        </p:nvSpPr>
+        <p:spPr/>
+        <p:txBody>
+          <a:bodyPr/>
+          <a:lstStyle/>
+          <a:p>
+            <a:r>
+              <a:t>第三个环节是候选抗菌肽预测。这里采用 Attention、LSTM、BERT 三个深度学习模型分别预测，只有三者一致判为阳性的序列才纳入候选集合，以提高候选集的可信度。这一步骤已经完成。</a:t>
+            </a:r>
+          </a:p>
+        </p:txBody>
+      </p:sp>
+      <p:sp>
+        <p:nvSpPr>
+          <p:cNvPr id="4" name="Slide Number Placeholder 3"/>
+          <p:cNvSpPr>
+            <a:spLocks noGrp="1"/>
+          </p:cNvSpPr>
+          <p:nvPr>
+            <p:ph type="sldNum" idx="5" sz="quarter"/>
+          </p:nvPr>
+        </p:nvSpPr>
+        <p:spPr/>
+      </p:sp>
+    </p:spTree>
+  </p:cSld>
+  <p:clrMapOvr>
+    <a:masterClrMapping/>
+  </p:clrMapOvr>
+</p:notes>
+</file>
+
+<file path=ppt/notesSlides/notesSlide7.xml><?xml version="1.0" encoding="utf-8"?>
+<p:notes xmlns:a="http://schemas.openxmlformats.org/drawingml/2006/main" xmlns:p="http://schemas.openxmlformats.org/presentationml/2006/main" xmlns:r="http://schemas.openxmlformats.org/officeDocument/2006/relationships">
+  <p:cSld>
+    <p:spTree>
+      <p:nvGrpSpPr>
+        <p:cNvPr id="1" name=""/>
+        <p:cNvGrpSpPr/>
+        <p:nvPr/>
+      </p:nvGrpSpPr>
+      <p:grpSpPr>
+        <a:xfrm>
+          <a:off x="0" y="0"/>
+          <a:ext cx="0" cy="0"/>
+          <a:chOff x="0" y="0"/>
+          <a:chExt cx="0" cy="0"/>
+        </a:xfrm>
+      </p:grpSpPr>
+      <p:sp>
+        <p:nvSpPr>
+          <p:cNvPr id="2" name="Slide Image Placeholder 1"/>
+          <p:cNvSpPr>
+            <a:spLocks noGrp="1"/>
+          </p:cNvSpPr>
+          <p:nvPr>
+            <p:ph type="sldImg" idx="2"/>
+          </p:nvPr>
+        </p:nvSpPr>
+        <p:spPr/>
+      </p:sp>
+      <p:sp>
+        <p:nvSpPr>
+          <p:cNvPr id="3" name="Notes Placeholder 2"/>
+          <p:cNvSpPr>
+            <a:spLocks noGrp="1"/>
+          </p:cNvSpPr>
+          <p:nvPr>
+            <p:ph type="body" idx="3" sz="quarter"/>
+          </p:nvPr>
+        </p:nvSpPr>
+        <p:spPr/>
+        <p:txBody>
+          <a:bodyPr/>
+          <a:lstStyle/>
+          <a:p>
+            <a:r>
+              <a:t>第四个环节是分阶段差异分析：把队列按认知阶段分组，比较各阶段与健康人群之间候选抗菌肽的丰度与组成差异，得到一批随病程变化的候选抗菌肽。这一步骤也已经完成。</a:t>
+            </a:r>
+          </a:p>
+        </p:txBody>
+      </p:sp>
+      <p:sp>
+        <p:nvSpPr>
+          <p:cNvPr id="4" name="Slide Number Placeholder 3"/>
+          <p:cNvSpPr>
+            <a:spLocks noGrp="1"/>
+          </p:cNvSpPr>
+          <p:nvPr>
+            <p:ph type="sldNum" idx="5" sz="quarter"/>
+          </p:nvPr>
+        </p:nvSpPr>
+        <p:spPr/>
+      </p:sp>
+    </p:spTree>
+  </p:cSld>
+  <p:clrMapOvr>
+    <a:masterClrMapping/>
+  </p:clrMapOvr>
+</p:notes>
+</file>
+
+<file path=ppt/notesSlides/notesSlide8.xml><?xml version="1.0" encoding="utf-8"?>
+<p:notes xmlns:a="http://schemas.openxmlformats.org/drawingml/2006/main" xmlns:p="http://schemas.openxmlformats.org/presentationml/2006/main" xmlns:r="http://schemas.openxmlformats.org/officeDocument/2006/relationships">
+  <p:cSld>
+    <p:spTree>
+      <p:nvGrpSpPr>
+        <p:cNvPr id="1" name=""/>
+        <p:cNvGrpSpPr/>
+        <p:nvPr/>
+      </p:nvGrpSpPr>
+      <p:grpSpPr>
+        <a:xfrm>
+          <a:off x="0" y="0"/>
+          <a:ext cx="0" cy="0"/>
+          <a:chOff x="0" y="0"/>
+          <a:chExt cx="0" cy="0"/>
+        </a:xfrm>
+      </p:grpSpPr>
+      <p:sp>
+        <p:nvSpPr>
+          <p:cNvPr id="2" name="Slide Image Placeholder 1"/>
+          <p:cNvSpPr>
+            <a:spLocks noGrp="1"/>
+          </p:cNvSpPr>
+          <p:nvPr>
+            <p:ph type="sldImg" idx="2"/>
+          </p:nvPr>
+        </p:nvSpPr>
+        <p:spPr/>
+      </p:sp>
+      <p:sp>
+        <p:nvSpPr>
+          <p:cNvPr id="3" name="Notes Placeholder 2"/>
+          <p:cNvSpPr>
+            <a:spLocks noGrp="1"/>
+          </p:cNvSpPr>
+          <p:nvPr>
+            <p:ph type="body" idx="3" sz="quarter"/>
+          </p:nvPr>
+        </p:nvSpPr>
+        <p:spPr/>
+        <p:txBody>
+          <a:bodyPr/>
+          <a:lstStyle/>
+          <a:p>
+            <a:r>
+              <a:t>差异分析之后，引入宏蛋白组的表达证据做二次去重：只保留在蛋白层面真实存在并可检出的抗菌肽，再通过组内共有、组间特有的比较，得到健康人群特有与各疾病阶段特有的抗菌肽清单。这一步同样已经完成。</a:t>
+            </a:r>
+          </a:p>
+        </p:txBody>
+      </p:sp>
+      <p:sp>
+        <p:nvSpPr>
+          <p:cNvPr id="4" name="Slide Number Placeholder 3"/>
+          <p:cNvSpPr>
+            <a:spLocks noGrp="1"/>
+          </p:cNvSpPr>
+          <p:nvPr>
+            <p:ph type="sldNum" idx="5" sz="quarter"/>
+          </p:nvPr>
+        </p:nvSpPr>
+        <p:spPr/>
+      </p:sp>
+    </p:spTree>
+  </p:cSld>
+  <p:clrMapOvr>
+    <a:masterClrMapping/>
+  </p:clrMapOvr>
+</p:notes>
+</file>
+
+<file path=ppt/notesSlides/notesSlide9.xml><?xml version="1.0" encoding="utf-8"?>
+<p:notes xmlns:a="http://schemas.openxmlformats.org/drawingml/2006/main" xmlns:p="http://schemas.openxmlformats.org/presentationml/2006/main" xmlns:r="http://schemas.openxmlformats.org/officeDocument/2006/relationships">
+  <p:cSld>
+    <p:spTree>
+      <p:nvGrpSpPr>
+        <p:cNvPr id="1" name=""/>
+        <p:cNvGrpSpPr/>
+        <p:nvPr/>
+      </p:nvGrpSpPr>
+      <p:grpSpPr>
+        <a:xfrm>
+          <a:off x="0" y="0"/>
+          <a:ext cx="0" cy="0"/>
+          <a:chOff x="0" y="0"/>
+          <a:chExt cx="0" cy="0"/>
+        </a:xfrm>
+      </p:grpSpPr>
+      <p:sp>
+        <p:nvSpPr>
+          <p:cNvPr id="2" name="Slide Image Placeholder 1"/>
+          <p:cNvSpPr>
+            <a:spLocks noGrp="1"/>
+          </p:cNvSpPr>
+          <p:nvPr>
+            <p:ph type="sldImg" idx="2"/>
+          </p:nvPr>
+        </p:nvSpPr>
+        <p:spPr/>
+      </p:sp>
+      <p:sp>
+        <p:nvSpPr>
+          <p:cNvPr id="3" name="Notes Placeholder 2"/>
+          <p:cNvSpPr>
+            <a:spLocks noGrp="1"/>
+          </p:cNvSpPr>
+          <p:nvPr>
+            <p:ph type="body" idx="3" sz="quarter"/>
+          </p:nvPr>
+        </p:nvSpPr>
+        <p:spPr/>
+        <p:txBody>
+          <a:bodyPr/>
+          <a:lstStyle/>
+          <a:p>
+            <a:r>
+              <a:t>接下来是与发病机制的关联分析。参照乙酰胆碱酯酶与 β-淀粉样肽复合物分子模拟研究的思路，从三个方向考察：与 Aβ 的相互作用、与 AChE 外周阴离子位点的结合，以及免疫与炎症通路。目前这一步正在进行。</a:t>
+            </a:r>
+          </a:p>
+        </p:txBody>
+      </p:sp>
+      <p:sp>
+        <p:nvSpPr>
+          <p:cNvPr id="4" name="Slide Number Placeholder 3"/>
+          <p:cNvSpPr>
+            <a:spLocks noGrp="1"/>
+          </p:cNvSpPr>
+          <p:nvPr>
+            <p:ph type="sldNum" idx="5" sz="quarter"/>
+          </p:nvPr>
+        </p:nvSpPr>
+        <p:spPr/>
+      </p:sp>
+    </p:spTree>
+  </p:cSld>
+  <p:clrMapOvr>
+    <a:masterClrMapping/>
+  </p:clrMapOvr>
+</p:notes>
 </file>
 
 <file path=ppt/slideLayouts/slideLayout1.xml><?xml version="1.0" encoding="utf-8"?>
@@ -6648,7 +8118,7 @@
                 <a:ea typeface="微软雅黑"/>
                 <a:cs typeface="Arial"/>
               </a:rPr>
-              <a:t>研究思路：八步走，前三步与预测已完成</a:t>
+              <a:t>研究思路：八步走的整体框架与完成进度</a:t>
             </a:r>
           </a:p>
         </p:txBody>
@@ -9782,4 +11252,324 @@
   </a:objectDefaults>
   <a:extraClrSchemeLst/>
 </a:theme>
+</file>
+
+<file path=ppt/theme/theme2.xml><?xml version="1.0" encoding="utf-8"?>
+<a:theme xmlns:a="http://schemas.openxmlformats.org/drawingml/2006/main" name="Office Theme">
+  <a:themeElements>
+    <a:clrScheme name="Office">
+      <a:dk1>
+        <a:sysClr val="windowText" lastClr="000000"/>
+      </a:dk1>
+      <a:lt1>
+        <a:sysClr val="window" lastClr="FFFFFF"/>
+      </a:lt1>
+      <a:dk2>
+        <a:srgbClr val="1F497D"/>
+      </a:dk2>
+      <a:lt2>
+        <a:srgbClr val="EEECE1"/>
+      </a:lt2>
+      <a:accent1>
+        <a:srgbClr val="4F81BD"/>
+      </a:accent1>
+      <a:accent2>
+        <a:srgbClr val="C0504D"/>
+      </a:accent2>
+      <a:accent3>
+        <a:srgbClr val="9BBB59"/>
+      </a:accent3>
+      <a:accent4>
+        <a:srgbClr val="8064A2"/>
+      </a:accent4>
+      <a:accent5>
+        <a:srgbClr val="4BACC6"/>
+      </a:accent5>
+      <a:accent6>
+        <a:srgbClr val="F79646"/>
+      </a:accent6>
+      <a:hlink>
+        <a:srgbClr val="0000FF"/>
+      </a:hlink>
+      <a:folHlink>
+        <a:srgbClr val="800080"/>
+      </a:folHlink>
+    </a:clrScheme>
+    <a:fontScheme name="Office">
+      <a:majorFont>
+        <a:latin typeface="Calibri"/>
+        <a:ea typeface=""/>
+        <a:cs typeface=""/>
+        <a:font script="Jpan" typeface="ＭＳ Ｐゴシック"/>
+        <a:font script="Hang" typeface="맑은 고딕"/>
+        <a:font script="Hans" typeface="宋体"/>
+        <a:font script="Hant" typeface="新細明體"/>
+        <a:font script="Arab" typeface="Times New Roman"/>
+        <a:font script="Hebr" typeface="Times New Roman"/>
+        <a:font script="Thai" typeface="Angsana New"/>
+        <a:font script="Ethi" typeface="Nyala"/>
+        <a:font script="Beng" typeface="Vrinda"/>
+        <a:font script="Gujr" typeface="Shruti"/>
+        <a:font script="Khmr" typeface="MoolBoran"/>
+        <a:font script="Knda" typeface="Tunga"/>
+        <a:font script="Guru" typeface="Raavi"/>
+        <a:font script="Cans" typeface="Euphemia"/>
+        <a:font script="Cher" typeface="Plantagenet Cherokee"/>
+        <a:font script="Yiii" typeface="Microsoft Yi Baiti"/>
+        <a:font script="Tibt" typeface="Microsoft Himalaya"/>
+        <a:font script="Thaa" typeface="MV Boli"/>
+        <a:font script="Deva" typeface="Mangal"/>
+        <a:font script="Telu" typeface="Gautami"/>
+        <a:font script="Taml" typeface="Latha"/>
+        <a:font script="Syrc" typeface="Estrangelo Edessa"/>
+        <a:font script="Orya" typeface="Kalinga"/>
+        <a:font script="Mlym" typeface="Kartika"/>
+        <a:font script="Laoo" typeface="DokChampa"/>
+        <a:font script="Sinh" typeface="Iskoola Pota"/>
+        <a:font script="Mong" typeface="Mongolian Baiti"/>
+        <a:font script="Viet" typeface="Times New Roman"/>
+        <a:font script="Uigh" typeface="Microsoft Uighur"/>
+        <a:font script="Geor" typeface="Sylfaen"/>
+      </a:majorFont>
+      <a:minorFont>
+        <a:latin typeface="Calibri"/>
+        <a:ea typeface=""/>
+        <a:cs typeface=""/>
+        <a:font script="Jpan" typeface="ＭＳ Ｐゴシック"/>
+        <a:font script="Hang" typeface="맑은 고딕"/>
+        <a:font script="Hans" typeface="宋体"/>
+        <a:font script="Hant" typeface="新細明體"/>
+        <a:font script="Arab" typeface="Arial"/>
+        <a:font script="Hebr" typeface="Arial"/>
+        <a:font script="Thai" typeface="Cordia New"/>
+        <a:font script="Ethi" typeface="Nyala"/>
+        <a:font script="Beng" typeface="Vrinda"/>
+        <a:font script="Gujr" typeface="Shruti"/>
+        <a:font script="Khmr" typeface="DaunPenh"/>
+        <a:font script="Knda" typeface="Tunga"/>
+        <a:font script="Guru" typeface="Raavi"/>
+        <a:font script="Cans" typeface="Euphemia"/>
+        <a:font script="Cher" typeface="Plantagenet Cherokee"/>
+        <a:font script="Yiii" typeface="Microsoft Yi Baiti"/>
+        <a:font script="Tibt" typeface="Microsoft Himalaya"/>
+        <a:font script="Thaa" typeface="MV Boli"/>
+        <a:font script="Deva" typeface="Mangal"/>
+        <a:font script="Telu" typeface="Gautami"/>
+        <a:font script="Taml" typeface="Latha"/>
+        <a:font script="Syrc" typeface="Estrangelo Edessa"/>
+        <a:font script="Orya" typeface="Kalinga"/>
+        <a:font script="Mlym" typeface="Kartika"/>
+        <a:font script="Laoo" typeface="DokChampa"/>
+        <a:font script="Sinh" typeface="Iskoola Pota"/>
+        <a:font script="Mong" typeface="Mongolian Baiti"/>
+        <a:font script="Viet" typeface="Arial"/>
+        <a:font script="Uigh" typeface="Microsoft Uighur"/>
+        <a:font script="Geor" typeface="Sylfaen"/>
+      </a:minorFont>
+    </a:fontScheme>
+    <a:fmtScheme name="Office">
+      <a:fillStyleLst>
+        <a:solidFill>
+          <a:schemeClr val="phClr"/>
+        </a:solidFill>
+        <a:gradFill rotWithShape="1">
+          <a:gsLst>
+            <a:gs pos="0">
+              <a:schemeClr val="phClr">
+                <a:tint val="50000"/>
+                <a:satMod val="300000"/>
+              </a:schemeClr>
+            </a:gs>
+            <a:gs pos="35000">
+              <a:schemeClr val="phClr">
+                <a:tint val="37000"/>
+                <a:satMod val="300000"/>
+              </a:schemeClr>
+            </a:gs>
+            <a:gs pos="100000">
+              <a:schemeClr val="phClr">
+                <a:tint val="15000"/>
+                <a:satMod val="350000"/>
+              </a:schemeClr>
+            </a:gs>
+          </a:gsLst>
+          <a:lin ang="16200000" scaled="1"/>
+        </a:gradFill>
+        <a:gradFill rotWithShape="1">
+          <a:gsLst>
+            <a:gs pos="0">
+              <a:schemeClr val="phClr">
+                <a:tint val="100000"/>
+                <a:shade val="100000"/>
+                <a:satMod val="130000"/>
+              </a:schemeClr>
+            </a:gs>
+            <a:gs pos="100000">
+              <a:schemeClr val="phClr">
+                <a:tint val="50000"/>
+                <a:shade val="100000"/>
+                <a:satMod val="350000"/>
+              </a:schemeClr>
+            </a:gs>
+          </a:gsLst>
+          <a:lin ang="16200000" scaled="0"/>
+        </a:gradFill>
+      </a:fillStyleLst>
+      <a:lnStyleLst>
+        <a:ln w="9525" cap="flat" cmpd="sng" algn="ctr">
+          <a:solidFill>
+            <a:schemeClr val="phClr">
+              <a:shade val="95000"/>
+              <a:satMod val="105000"/>
+            </a:schemeClr>
+          </a:solidFill>
+          <a:prstDash val="solid"/>
+        </a:ln>
+        <a:ln w="25400" cap="flat" cmpd="sng" algn="ctr">
+          <a:solidFill>
+            <a:schemeClr val="phClr"/>
+          </a:solidFill>
+          <a:prstDash val="solid"/>
+        </a:ln>
+        <a:ln w="38100" cap="flat" cmpd="sng" algn="ctr">
+          <a:solidFill>
+            <a:schemeClr val="phClr"/>
+          </a:solidFill>
+          <a:prstDash val="solid"/>
+        </a:ln>
+      </a:lnStyleLst>
+      <a:effectStyleLst>
+        <a:effectStyle>
+          <a:effectLst>
+            <a:outerShdw blurRad="40000" dist="20000" dir="5400000" rotWithShape="0">
+              <a:srgbClr val="000000">
+                <a:alpha val="38000"/>
+              </a:srgbClr>
+            </a:outerShdw>
+          </a:effectLst>
+        </a:effectStyle>
+        <a:effectStyle>
+          <a:effectLst>
+            <a:outerShdw blurRad="40000" dist="23000" dir="5400000" rotWithShape="0">
+              <a:srgbClr val="000000">
+                <a:alpha val="35000"/>
+              </a:srgbClr>
+            </a:outerShdw>
+          </a:effectLst>
+        </a:effectStyle>
+        <a:effectStyle>
+          <a:effectLst>
+            <a:outerShdw blurRad="40000" dist="23000" dir="5400000" rotWithShape="0">
+              <a:srgbClr val="000000">
+                <a:alpha val="35000"/>
+              </a:srgbClr>
+            </a:outerShdw>
+          </a:effectLst>
+          <a:scene3d>
+            <a:camera prst="orthographicFront">
+              <a:rot lat="0" lon="0" rev="0"/>
+            </a:camera>
+            <a:lightRig rig="threePt" dir="t">
+              <a:rot lat="0" lon="0" rev="1200000"/>
+            </a:lightRig>
+          </a:scene3d>
+          <a:sp3d>
+            <a:bevelT w="63500" h="25400"/>
+          </a:sp3d>
+        </a:effectStyle>
+      </a:effectStyleLst>
+      <a:bgFillStyleLst>
+        <a:solidFill>
+          <a:schemeClr val="phClr"/>
+        </a:solidFill>
+        <a:gradFill rotWithShape="1">
+          <a:gsLst>
+            <a:gs pos="0">
+              <a:schemeClr val="phClr">
+                <a:tint val="40000"/>
+                <a:satMod val="350000"/>
+              </a:schemeClr>
+            </a:gs>
+            <a:gs pos="40000">
+              <a:schemeClr val="phClr">
+                <a:tint val="45000"/>
+                <a:shade val="99000"/>
+                <a:satMod val="350000"/>
+              </a:schemeClr>
+            </a:gs>
+            <a:gs pos="100000">
+              <a:schemeClr val="phClr">
+                <a:shade val="20000"/>
+                <a:satMod val="255000"/>
+              </a:schemeClr>
+            </a:gs>
+          </a:gsLst>
+          <a:path path="circle">
+            <a:fillToRect l="50000" t="-80000" r="50000" b="180000"/>
+          </a:path>
+        </a:gradFill>
+        <a:gradFill rotWithShape="1">
+          <a:gsLst>
+            <a:gs pos="0">
+              <a:schemeClr val="phClr">
+                <a:tint val="80000"/>
+                <a:satMod val="300000"/>
+              </a:schemeClr>
+            </a:gs>
+            <a:gs pos="100000">
+              <a:schemeClr val="phClr">
+                <a:shade val="30000"/>
+                <a:satMod val="200000"/>
+              </a:schemeClr>
+            </a:gs>
+          </a:gsLst>
+          <a:path path="circle">
+            <a:fillToRect l="50000" t="50000" r="50000" b="50000"/>
+          </a:path>
+        </a:gradFill>
+      </a:bgFillStyleLst>
+    </a:fmtScheme>
+  </a:themeElements>
+  <a:objectDefaults>
+    <a:spDef>
+      <a:spPr/>
+      <a:bodyPr/>
+      <a:lstStyle/>
+      <a:style>
+        <a:lnRef idx="1">
+          <a:schemeClr val="accent1"/>
+        </a:lnRef>
+        <a:fillRef idx="3">
+          <a:schemeClr val="accent1"/>
+        </a:fillRef>
+        <a:effectRef idx="2">
+          <a:schemeClr val="accent1"/>
+        </a:effectRef>
+        <a:fontRef idx="minor">
+          <a:schemeClr val="lt1"/>
+        </a:fontRef>
+      </a:style>
+    </a:spDef>
+    <a:lnDef>
+      <a:spPr/>
+      <a:bodyPr/>
+      <a:lstStyle/>
+      <a:style>
+        <a:lnRef idx="2">
+          <a:schemeClr val="accent1"/>
+        </a:lnRef>
+        <a:fillRef idx="0">
+          <a:schemeClr val="accent1"/>
+        </a:fillRef>
+        <a:effectRef idx="1">
+          <a:schemeClr val="accent1"/>
+        </a:effectRef>
+        <a:fontRef idx="minor">
+          <a:schemeClr val="tx1"/>
+        </a:fontRef>
+      </a:style>
+    </a:lnDef>
+  </a:objectDefaults>
+  <a:extraClrSchemeLst/>
+</a:theme>
 </file>
--- a/deliverable/中期答辩.pptx
+++ b/deliverable/中期答辩.pptx
@@ -4743,8 +4743,8 @@
         </p:nvSpPr>
         <p:spPr>
           <a:xfrm>
-            <a:off x="566928" y="4297680"/>
-            <a:ext cx="11057839" cy="1645920"/>
+            <a:off x="566928" y="4224528"/>
+            <a:ext cx="11057839" cy="1737360"/>
           </a:xfrm>
           <a:prstGeom prst="rect">
             <a:avLst/>
@@ -4778,7 +4778,7 @@
                 <a:ea typeface="微软雅黑"/>
                 <a:cs typeface="Arial"/>
               </a:rPr>
-              <a:t>汇报人：【姓名】　　学号：【学号】</a:t>
+              <a:t>汇报人：文绍华　　学号：2024110316</a:t>
             </a:r>
           </a:p>
           <a:p>
@@ -4802,7 +4802,31 @@
                 <a:ea typeface="微软雅黑"/>
                 <a:cs typeface="Arial"/>
               </a:rPr>
-              <a:t>指导教师：【导师姓名】　　培养单位：【学院】</a:t>
+              <a:t>指导教师：申亮　　培养单位：生命科学学院</a:t>
+            </a:r>
+          </a:p>
+          <a:p>
+            <a:pPr algn="ctr">
+              <a:lnSpc>
+                <a:spcPct val="118000"/>
+              </a:lnSpc>
+              <a:spcBef>
+                <a:spcPts val="1000"/>
+              </a:spcBef>
+              <a:spcAft>
+                <a:spcPts val="0"/>
+              </a:spcAft>
+            </a:pPr>
+            <a:r>
+              <a:rPr sz="1700" b="0">
+                <a:solidFill>
+                  <a:srgbClr val="12324F"/>
+                </a:solidFill>
+                <a:latin typeface="Arial"/>
+                <a:ea typeface="微软雅黑"/>
+                <a:cs typeface="Arial"/>
+              </a:rPr>
+              <a:t>学科专业：生物学（生物化学与分子生物学）</a:t>
             </a:r>
           </a:p>
           <a:p>
@@ -7592,7 +7616,7 @@
                 <a:ea typeface="微软雅黑"/>
                 <a:cs typeface="Arial"/>
               </a:rPr>
-              <a:t>汇报人：【姓名】　指导教师：【导师姓名】</a:t>
+              <a:t>汇报人：文绍华　指导教师：申亮</a:t>
             </a:r>
           </a:p>
         </p:txBody>
